--- a/Lectures/week06/week06.pptx
+++ b/Lectures/week06/week06.pptx
@@ -24,6 +24,8 @@
     <p:sldId id="272" r:id="rId24"/>
     <p:sldId id="273" r:id="rId25"/>
     <p:sldId id="274" r:id="rId26"/>
+    <p:sldId id="275" r:id="rId27"/>
+    <p:sldId id="276" r:id="rId28"/>
   </p:sldIdLst>
   <p:sldSz cx="12191695" cy="6858000" type="screen4x3"/>
   <p:notesSz cx="6858000" cy="9144000"/>
@@ -654,7 +656,77 @@
           <a:lstStyle/>
           <a:p>
             <a:r>
-              <a:t>Part three. Every build week has this section, and today's is serious.</a:t>
+              <a:t>Concrete candidates, so nobody spends five of their twenty minutes deciding what to build.</a:t>
+            </a:r>
+          </a:p>
+          <a:p/>
+          <a:p>
+            <a:r>
+              <a:t>Healthcare and education. A dosage-schedule formatter — take a prescription, produce a printable</a:t>
+            </a:r>
+          </a:p>
+          <a:p>
+            <a:r>
+              <a:t>timetable a patient can put on the fridge. A rubric scorer that takes your marks and produces</a:t>
+            </a:r>
+          </a:p>
+          <a:p>
+            <a:r>
+              <a:t>standard feedback text. A reading-level checker for patient information, which several of you</a:t>
+            </a:r>
+          </a:p>
+          <a:p>
+            <a:r>
+              <a:t>could specify very precisely after last week.</a:t>
+            </a:r>
+          </a:p>
+          <a:p/>
+          <a:p>
+            <a:r>
+              <a:t>Law and business. A clause checklist that confirms a draft contains your standard sections. A</a:t>
+            </a:r>
+          </a:p>
+          <a:p>
+            <a:r>
+              <a:t>citation formatter. A meeting-note structurer that takes free text and sorts it into decisions,</a:t>
+            </a:r>
+          </a:p>
+          <a:p>
+            <a:r>
+              <a:t>actions and open questions.</a:t>
+            </a:r>
+          </a:p>
+          <a:p/>
+          <a:p>
+            <a:r>
+              <a:t>Engineering and anything else. A unit converter for the specific quantities your lab actually</a:t>
+            </a:r>
+          </a:p>
+          <a:p>
+            <a:r>
+              <a:t>uses — not a general one, yours, with your units and your precision. A checklist generator for a</a:t>
+            </a:r>
+          </a:p>
+          <a:p>
+            <a:r>
+              <a:t>recurring procedure. A form that turns five fields into a correctly worded standard message.</a:t>
+            </a:r>
+          </a:p>
+          <a:p/>
+          <a:p>
+            <a:r>
+              <a:t>Look at what all nine have in common. Every one is boring. Every one is something a person</a:t>
+            </a:r>
+          </a:p>
+          <a:p>
+            <a:r>
+              <a:t>currently does by hand, repeatedly, slightly differently each time. None of them require judgment.</a:t>
+            </a:r>
+          </a:p>
+          <a:p/>
+          <a:p>
+            <a:r>
+              <a:t>That's the target. If your idea sounds impressive, it's probably too big.</a:t>
             </a:r>
           </a:p>
         </p:txBody>
@@ -724,67 +796,76 @@
           <a:lstStyle/>
           <a:p>
             <a:r>
-              <a:t>Here's the danger, stated plainly.</a:t>
+              <a:t>When the first attempt is wrong — and it often is, in a small way — here's how to fix it without</a:t>
+            </a:r>
+          </a:p>
+          <a:p>
+            <a:r>
+              <a:t>making things worse.</a:t>
             </a:r>
           </a:p>
           <a:p/>
           <a:p>
             <a:r>
-              <a:t>You can see whether it looks right. You cannot see whether it is right.</a:t>
+              <a:t>Describe the behaviour you want, not the code you imagine. Say "the date should show as fifteenth</a:t>
+            </a:r>
+          </a:p>
+          <a:p>
+            <a:r>
+              <a:t>of March twenty twenty-seven, not two-thousand-twenty-seven dash oh-three dash fifteen." Don't say</a:t>
+            </a:r>
+          </a:p>
+          <a:p>
+            <a:r>
+              <a:t>"change the date format function," because you're guessing at an internal structure you can't see,</a:t>
+            </a:r>
+          </a:p>
+          <a:p>
+            <a:r>
+              <a:t>and if you guess wrong the instruction is worse than useless.</a:t>
             </a:r>
           </a:p>
           <a:p/>
           <a:p>
             <a:r>
-              <a:t>And I want you to notice that this is exactly the gap from week one. A fluent, confident,</a:t>
-            </a:r>
-          </a:p>
-          <a:p>
-            <a:r>
-              <a:t>professional-looking output that may or may not be correct, produced by a system with no</a:t>
-            </a:r>
-          </a:p>
-          <a:p>
-            <a:r>
-              <a:t>mechanism for checking.</a:t>
+              <a:t>Give a concrete failing example. "When I enter a name with an apostrophe, the output is blank. It</a:t>
+            </a:r>
+          </a:p>
+          <a:p>
+            <a:r>
+              <a:t>should show the name." That's a test case and a specification in one sentence, and it's far more</a:t>
+            </a:r>
+          </a:p>
+          <a:p>
+            <a:r>
+              <a:t>effective than "it doesn't handle special characters properly."</a:t>
             </a:r>
           </a:p>
           <a:p/>
           <a:p>
             <a:r>
-              <a:t>The only thing that's changed is the medium. In week one it was prose, and at least you could</a:t>
-            </a:r>
-          </a:p>
-          <a:p>
-            <a:r>
-              <a:t>read prose. Now it's software, and most of you cannot read it. So the one defence you had —</a:t>
-            </a:r>
-          </a:p>
-          <a:p>
-            <a:r>
-              <a:t>your own judgment applied to the output — is gone.</a:t>
+              <a:t>Change one thing at a time. Same reason as week four — otherwise you can't tell which change fixed</a:t>
+            </a:r>
+          </a:p>
+          <a:p>
+            <a:r>
+              <a:t>it, and you certainly can't tell what it broke.</a:t>
             </a:r>
           </a:p>
           <a:p/>
           <a:p>
             <a:r>
-              <a:t>The interface looks finished. The buttons work. It produces an answer. Everything your eye</a:t>
-            </a:r>
-          </a:p>
-          <a:p>
-            <a:r>
-              <a:t>uses to judge quality is present and correct, and none of it tells you whether the logic is</a:t>
-            </a:r>
-          </a:p>
-          <a:p>
-            <a:r>
-              <a:t>right.</a:t>
-            </a:r>
-          </a:p>
-          <a:p/>
-          <a:p>
-            <a:r>
-              <a:t>That's why the next slide exists, and it's the most important slide in today's session.</a:t>
+              <a:t>And re-test what already worked. You cannot see what a change affected. When you can read code,</a:t>
+            </a:r>
+          </a:p>
+          <a:p>
+            <a:r>
+              <a:t>you can look at the blast radius. You can't, so re-testing is the compensation. It isn't optional</a:t>
+            </a:r>
+          </a:p>
+          <a:p>
+            <a:r>
+              <a:t>and it isn't paranoia — it's the price of the trade you made.</a:t>
             </a:r>
           </a:p>
         </p:txBody>
@@ -854,81 +935,7 @@
           <a:lstStyle/>
           <a:p>
             <a:r>
-              <a:t>Three ways this fails, and none of them announce themselves.</a:t>
-            </a:r>
-          </a:p>
-          <a:p/>
-          <a:p>
-            <a:r>
-              <a:t>Wrong logic, right appearance. A calculation that's subtly wrong — a rounding rule, an</a:t>
-            </a:r>
-          </a:p>
-          <a:p>
-            <a:r>
-              <a:t>off-by-one error in a date, the wrong threshold in a comparison. The interface is perfect. The</a:t>
-            </a:r>
-          </a:p>
-          <a:p>
-            <a:r>
-              <a:t>number is wrong. And note the cruel detail: it's wrong *consistently*, every time, which is</a:t>
-            </a:r>
-          </a:p>
-          <a:p>
-            <a:r>
-              <a:t>exactly the behaviour we associate with reliability. A tool that failed randomly would get</a:t>
-            </a:r>
-          </a:p>
-          <a:p>
-            <a:r>
-              <a:t>caught. One that's steadily wrong looks trustworthy.</a:t>
-            </a:r>
-          </a:p>
-          <a:p/>
-          <a:p>
-            <a:r>
-              <a:t>Correct for the cases you tried. You tested it with typical input, because that's what comes</a:t>
-            </a:r>
-          </a:p>
-          <a:p>
-            <a:r>
-              <a:t>to mind. Nobody tested the empty field, the very long name, the date in the past, the name</a:t>
-            </a:r>
-          </a:p>
-          <a:p>
-            <a:r>
-              <a:t>with an apostrophe, the Turkish characters. Those paths were generated too — they were simply</a:t>
-            </a:r>
-          </a:p>
-          <a:p>
-            <a:r>
-              <a:t>never run. The code exists; nobody knows what it does.</a:t>
-            </a:r>
-          </a:p>
-          <a:p/>
-          <a:p>
-            <a:r>
-              <a:t>And silently discarded input. It accepts something, appears to process it, and quietly ignores</a:t>
-            </a:r>
-          </a:p>
-          <a:p>
-            <a:r>
-              <a:t>part of it. This is the worst one, because there's no error message and no visible gap. The</a:t>
-            </a:r>
-          </a:p>
-          <a:p>
-            <a:r>
-              <a:t>output is complete and confident and missing something.</a:t>
-            </a:r>
-          </a:p>
-          <a:p/>
-          <a:p>
-            <a:r>
-              <a:t>Notice that all three are the same shape as the failures from week one. Wrong content in a</a:t>
-            </a:r>
-          </a:p>
-          <a:p>
-            <a:r>
-              <a:t>right-looking container.</a:t>
+              <a:t>Part three. Every build week has this section, and today's is serious.</a:t>
             </a:r>
           </a:p>
         </p:txBody>
@@ -998,81 +1005,67 @@
           <a:lstStyle/>
           <a:p>
             <a:r>
-              <a:t>Four rules. These are the professional practice, and they're what I'd actually want you doing</a:t>
-            </a:r>
-          </a:p>
-          <a:p>
-            <a:r>
-              <a:t>in six months.</a:t>
+              <a:t>Here's the danger, stated plainly.</a:t>
             </a:r>
           </a:p>
           <a:p/>
           <a:p>
             <a:r>
-              <a:t>Test the edges before you trust it, not after. Empty input. Very long input. Turkish</a:t>
-            </a:r>
-          </a:p>
-          <a:p>
-            <a:r>
-              <a:t>characters — genuinely, test these, because a lot of generated code assumes English text and</a:t>
-            </a:r>
-          </a:p>
-          <a:p>
-            <a:r>
-              <a:t>breaks on them. A date in the past. A number where text was expected. Five minutes of this</a:t>
-            </a:r>
-          </a:p>
-          <a:p>
-            <a:r>
-              <a:t>tells you more than an hour of using it normally.</a:t>
+              <a:t>You can see whether it looks right. You cannot see whether it is right.</a:t>
             </a:r>
           </a:p>
           <a:p/>
           <a:p>
             <a:r>
-              <a:t>Check a case where you already know the answer. Run something you've done by hand. If it</a:t>
-            </a:r>
-          </a:p>
-          <a:p>
-            <a:r>
-              <a:t>agrees, you've gained confidence. If it disagrees, you've learned something important — and</a:t>
-            </a:r>
-          </a:p>
-          <a:p>
-            <a:r>
-              <a:t>notice you learn either way, which makes this the highest-value five minutes available.</a:t>
+              <a:t>And I want you to notice that this is exactly the gap from week one. A fluent, confident,</a:t>
+            </a:r>
+          </a:p>
+          <a:p>
+            <a:r>
+              <a:t>professional-looking output that may or may not be correct, produced by a system with no</a:t>
+            </a:r>
+          </a:p>
+          <a:p>
+            <a:r>
+              <a:t>mechanism for checking.</a:t>
             </a:r>
           </a:p>
           <a:p/>
           <a:p>
             <a:r>
-              <a:t>Keep it advisory. It drafts, formats, checks, reminds. A person decides. Never let a</a:t>
-            </a:r>
-          </a:p>
-          <a:p>
-            <a:r>
-              <a:t>Micro-Tool be the final step before something reaches a patient or a client. Not because it's</a:t>
-            </a:r>
-          </a:p>
-          <a:p>
-            <a:r>
-              <a:t>bad — because you cannot verify it, and unverifiable things need a human between them and</a:t>
-            </a:r>
-          </a:p>
-          <a:p>
-            <a:r>
-              <a:t>consequences.</a:t>
+              <a:t>The only thing that's changed is the medium. In week one it was prose, and at least you could</a:t>
+            </a:r>
+          </a:p>
+          <a:p>
+            <a:r>
+              <a:t>read prose. Now it's software, and most of you cannot read it. So the one defence you had —</a:t>
+            </a:r>
+          </a:p>
+          <a:p>
+            <a:r>
+              <a:t>your own judgment applied to the output — is gone.</a:t>
             </a:r>
           </a:p>
           <a:p/>
           <a:p>
             <a:r>
-              <a:t>And don't put real personal data into it. You don't know where the input goes, who hosts it,</a:t>
-            </a:r>
-          </a:p>
-          <a:p>
-            <a:r>
-              <a:t>or what's logged. That's week twelve, and it applies from today.</a:t>
+              <a:t>The interface looks finished. The buttons work. It produces an answer. Everything your eye</a:t>
+            </a:r>
+          </a:p>
+          <a:p>
+            <a:r>
+              <a:t>uses to judge quality is present and correct, and none of it tells you whether the logic is</a:t>
+            </a:r>
+          </a:p>
+          <a:p>
+            <a:r>
+              <a:t>right.</a:t>
+            </a:r>
+          </a:p>
+          <a:p/>
+          <a:p>
+            <a:r>
+              <a:t>That's why the next slide exists, and it's the most important slide in today's session.</a:t>
             </a:r>
           </a:p>
         </p:txBody>
@@ -1142,7 +1135,81 @@
           <a:lstStyle/>
           <a:p>
             <a:r>
-              <a:t>Part four. Your turn. Twenty minutes.</a:t>
+              <a:t>Three ways this fails, and none of them announce themselves.</a:t>
+            </a:r>
+          </a:p>
+          <a:p/>
+          <a:p>
+            <a:r>
+              <a:t>Wrong logic, right appearance. A calculation that's subtly wrong — a rounding rule, an</a:t>
+            </a:r>
+          </a:p>
+          <a:p>
+            <a:r>
+              <a:t>off-by-one error in a date, the wrong threshold in a comparison. The interface is perfect. The</a:t>
+            </a:r>
+          </a:p>
+          <a:p>
+            <a:r>
+              <a:t>number is wrong. And note the cruel detail: it's wrong *consistently*, every time, which is</a:t>
+            </a:r>
+          </a:p>
+          <a:p>
+            <a:r>
+              <a:t>exactly the behaviour we associate with reliability. A tool that failed randomly would get</a:t>
+            </a:r>
+          </a:p>
+          <a:p>
+            <a:r>
+              <a:t>caught. One that's steadily wrong looks trustworthy.</a:t>
+            </a:r>
+          </a:p>
+          <a:p/>
+          <a:p>
+            <a:r>
+              <a:t>Correct for the cases you tried. You tested it with typical input, because that's what comes</a:t>
+            </a:r>
+          </a:p>
+          <a:p>
+            <a:r>
+              <a:t>to mind. Nobody tested the empty field, the very long name, the date in the past, the name</a:t>
+            </a:r>
+          </a:p>
+          <a:p>
+            <a:r>
+              <a:t>with an apostrophe, the Turkish characters. Those paths were generated too — they were simply</a:t>
+            </a:r>
+          </a:p>
+          <a:p>
+            <a:r>
+              <a:t>never run. The code exists; nobody knows what it does.</a:t>
+            </a:r>
+          </a:p>
+          <a:p/>
+          <a:p>
+            <a:r>
+              <a:t>And silently discarded input. It accepts something, appears to process it, and quietly ignores</a:t>
+            </a:r>
+          </a:p>
+          <a:p>
+            <a:r>
+              <a:t>part of it. This is the worst one, because there's no error message and no visible gap. The</a:t>
+            </a:r>
+          </a:p>
+          <a:p>
+            <a:r>
+              <a:t>output is complete and confident and missing something.</a:t>
+            </a:r>
+          </a:p>
+          <a:p/>
+          <a:p>
+            <a:r>
+              <a:t>Notice that all three are the same shape as the failures from week one. Wrong content in a</a:t>
+            </a:r>
+          </a:p>
+          <a:p>
+            <a:r>
+              <a:t>right-looking container.</a:t>
             </a:r>
           </a:p>
         </p:txBody>
@@ -1212,82 +1279,81 @@
           <a:lstStyle/>
           <a:p>
             <a:r>
-              <a:t>Twenty minutes. Four steps.</a:t>
+              <a:t>Four rules. These are the professional practice, and they're what I'd actually want you doing</a:t>
+            </a:r>
+          </a:p>
+          <a:p>
+            <a:r>
+              <a:t>in six months.</a:t>
             </a:r>
           </a:p>
           <a:p/>
           <a:p>
             <a:r>
-              <a:t>One. Pick one annoying, repetitive job from your own field. Small. Something you or someone</a:t>
-            </a:r>
-          </a:p>
-          <a:p>
-            <a:r>
-              <a:t>you know does by hand, often. Resist the urge to pick the most impressive thing you can think</a:t>
-            </a:r>
-          </a:p>
-          <a:p>
-            <a:r>
-              <a:t>of — pick the most boring one.</a:t>
+              <a:t>Test the edges before you trust it, not after. Empty input. Very long input. Turkish</a:t>
+            </a:r>
+          </a:p>
+          <a:p>
+            <a:r>
+              <a:t>characters — genuinely, test these, because a lot of generated code assumes English text and</a:t>
+            </a:r>
+          </a:p>
+          <a:p>
+            <a:r>
+              <a:t>breaks on them. A date in the past. A number where text was expected. Five minutes of this</a:t>
+            </a:r>
+          </a:p>
+          <a:p>
+            <a:r>
+              <a:t>tells you more than an hour of using it normally.</a:t>
             </a:r>
           </a:p>
           <a:p/>
           <a:p>
             <a:r>
-              <a:t>Two. Write the description using the four levers from week four. Context: who uses this and</a:t>
-            </a:r>
-          </a:p>
-          <a:p>
-            <a:r>
-              <a:t>in what situation. Task: what it does, specific verb and scope. Format: what the output looks</a:t>
-            </a:r>
-          </a:p>
-          <a:p>
-            <a:r>
-              <a:t>like. And an example output if it helps.</a:t>
+              <a:t>Check a case where you already know the answer. Run something you've done by hand. If it</a:t>
+            </a:r>
+          </a:p>
+          <a:p>
+            <a:r>
+              <a:t>agrees, you've gained confidence. If it disagrees, you've learned something important — and</a:t>
+            </a:r>
+          </a:p>
+          <a:p>
+            <a:r>
+              <a:t>notice you learn either way, which makes this the highest-value five minutes available.</a:t>
             </a:r>
           </a:p>
           <a:p/>
           <a:p>
             <a:r>
-              <a:t>Three. Generate it — and then immediately try to break it. Empty input. Turkish characters.</a:t>
-            </a:r>
-          </a:p>
-          <a:p>
-            <a:r>
-              <a:t>Something absurd. Note what happens. Don't skip this because the first version worked; the</a:t>
-            </a:r>
-          </a:p>
-          <a:p>
-            <a:r>
-              <a:t>breaking is where the learning is.</a:t>
+              <a:t>Keep it advisory. It drafts, formats, checks, reminds. A person decides. Never let a</a:t>
+            </a:r>
+          </a:p>
+          <a:p>
+            <a:r>
+              <a:t>Micro-Tool be the final step before something reaches a patient or a client. Not because it's</a:t>
+            </a:r>
+          </a:p>
+          <a:p>
+            <a:r>
+              <a:t>bad — because you cannot verify it, and unverifiable things need a human between them and</a:t>
+            </a:r>
+          </a:p>
+          <a:p>
+            <a:r>
+              <a:t>consequences.</a:t>
             </a:r>
           </a:p>
           <a:p/>
           <a:p>
             <a:r>
-              <a:t>Four. Write one sentence: what would you have to check before letting anyone else use this?</a:t>
-            </a:r>
-          </a:p>
-          <a:p>
-            <a:r>
-              <a:t>That sentence is the actual deliverable of today's session. Keep it.</a:t>
-            </a:r>
-          </a:p>
-          <a:p/>
-          <a:p>
-            <a:r>
-              <a:t>[Circulate. Common problems: too ambitious a scope — tell them to cut it in half; and</a:t>
-            </a:r>
-          </a:p>
-          <a:p>
-            <a:r>
-              <a:t>forgetting to test the edges — remind them at the ten-minute mark. If nobody is building, work</a:t>
-            </a:r>
-          </a:p>
-          <a:p>
-            <a:r>
-              <a:t>through step two aloud for one example from each discipline present.]</a:t>
+              <a:t>And don't put real personal data into it. You don't know where the input goes, who hosts it,</a:t>
+            </a:r>
+          </a:p>
+          <a:p>
+            <a:r>
+              <a:t>or what's logged. That's week twelve, and it applies from today.</a:t>
             </a:r>
           </a:p>
         </p:txBody>
@@ -1357,78 +1423,7 @@
           <a:lstStyle/>
           <a:p>
             <a:r>
-              <a:t>Whether or not you built one, here's what typically happens.</a:t>
-            </a:r>
-          </a:p>
-          <a:p/>
-          <a:p>
-            <a:r>
-              <a:t>It worked, and faster than expected. That's the normal outcome and it isn't luck — it's the</a:t>
-            </a:r>
-          </a:p>
-          <a:p>
-            <a:r>
-              <a:t>well-trodden-ground effect we discussed. Don't over-update on it.</a:t>
-            </a:r>
-          </a:p>
-          <a:p/>
-          <a:p>
-            <a:r>
-              <a:t>It broke on empty input, or handled it in a way nobody would have deliberately chosen.</a:t>
-            </a:r>
-          </a:p>
-          <a:p/>
-          <a:p>
-            <a:r>
-              <a:t>Turkish characters caused a problem somewhere. Very common, and worth remembering as a</a:t>
-            </a:r>
-          </a:p>
-          <a:p>
-            <a:r>
-              <a:t>systematic issue rather than bad luck — a lot of generated code carries assumptions from</a:t>
-            </a:r>
-          </a:p>
-          <a:p>
-            <a:r>
-              <a:t>predominantly English source material.</a:t>
-            </a:r>
-          </a:p>
-          <a:p/>
-          <a:p>
-            <a:r>
-              <a:t>And asking for a change worked, but occasionally broke something that had been working</a:t>
-            </a:r>
-          </a:p>
-          <a:p>
-            <a:r>
-              <a:t>before.</a:t>
-            </a:r>
-          </a:p>
-          <a:p/>
-          <a:p>
-            <a:r>
-              <a:t>That last one deserves its own name, in bold: you cannot see what a change affected. When you</a:t>
-            </a:r>
-          </a:p>
-          <a:p>
-            <a:r>
-              <a:t>modify code you can read, you can see the blast radius. When you ask for a modification in</a:t>
-            </a:r>
-          </a:p>
-          <a:p>
-            <a:r>
-              <a:t>plain language, you can't. Something three screens away may have changed.</a:t>
-            </a:r>
-          </a:p>
-          <a:p/>
-          <a:p>
-            <a:r>
-              <a:t>So: when you ask for a change, re-test the things that already worked. Every time. That's not</a:t>
-            </a:r>
-          </a:p>
-          <a:p>
-            <a:r>
-              <a:t>paranoia, it's the only compensation available for not being able to read the thing.</a:t>
+              <a:t>Part four. Your turn. Twenty minutes.</a:t>
             </a:r>
           </a:p>
         </p:txBody>
@@ -1498,79 +1493,82 @@
           <a:lstStyle/>
           <a:p>
             <a:r>
-              <a:t>This is the slide that connects today to your exam, and I'll do one of these every build week.</a:t>
+              <a:t>Twenty minutes. Four steps.</a:t>
             </a:r>
           </a:p>
           <a:p/>
           <a:p>
             <a:r>
-              <a:t>Five things you must be able to define and diagnose.</a:t>
+              <a:t>One. Pick one annoying, repetitive job from your own field. Small. Something you or someone</a:t>
+            </a:r>
+          </a:p>
+          <a:p>
+            <a:r>
+              <a:t>you know does by hand, often. Resist the urge to pick the most impressive thing you can think</a:t>
+            </a:r>
+          </a:p>
+          <a:p>
+            <a:r>
+              <a:t>of — pick the most boring one.</a:t>
             </a:r>
           </a:p>
           <a:p/>
           <a:p>
             <a:r>
-              <a:t>What a Micro-Tool is: single-purpose, single-screen, generated from a description, no stored</a:t>
-            </a:r>
-          </a:p>
-          <a:p>
-            <a:r>
-              <a:t>data.</a:t>
+              <a:t>Two. Write the description using the four levers from week four. Context: who uses this and</a:t>
+            </a:r>
+          </a:p>
+          <a:p>
+            <a:r>
+              <a:t>in what situation. Task: what it does, specific verb and scope. Format: what the output looks</a:t>
+            </a:r>
+          </a:p>
+          <a:p>
+            <a:r>
+              <a:t>like. And an example output if it helps.</a:t>
             </a:r>
           </a:p>
           <a:p/>
           <a:p>
             <a:r>
-              <a:t>Why generated code is well predicted: it's highly patterned, abundantly available, and common</a:t>
-            </a:r>
-          </a:p>
-          <a:p>
-            <a:r>
-              <a:t>tasks recur almost identically. If an exam question asks why these tools succeed at ordinary</a:t>
-            </a:r>
-          </a:p>
-          <a:p>
-            <a:r>
-              <a:t>software and struggle with unusual requirements, that's the answer.</a:t>
+              <a:t>Three. Generate it — and then immediately try to break it. Empty input. Turkish characters.</a:t>
+            </a:r>
+          </a:p>
+          <a:p>
+            <a:r>
+              <a:t>Something absurd. Note what happens. Don't skip this because the first version worked; the</a:t>
+            </a:r>
+          </a:p>
+          <a:p>
+            <a:r>
+              <a:t>breaking is where the learning is.</a:t>
             </a:r>
           </a:p>
           <a:p/>
           <a:p>
             <a:r>
-              <a:t>The verification gap. You can judge appearance; you cannot judge logic. The surface is not</a:t>
-            </a:r>
-          </a:p>
-          <a:p>
-            <a:r>
-              <a:t>evidence. Learn that sentence.</a:t>
+              <a:t>Four. Write one sentence: what would you have to check before letting anyone else use this?</a:t>
+            </a:r>
+          </a:p>
+          <a:p>
+            <a:r>
+              <a:t>That sentence is the actual deliverable of today's session. Keep it.</a:t>
             </a:r>
           </a:p>
           <a:p/>
           <a:p>
             <a:r>
-              <a:t>The three quiet failures, by name: wrong logic with right appearance; correct only for the</a:t>
-            </a:r>
-          </a:p>
-          <a:p>
-            <a:r>
-              <a:t>cases tried; silently discarded input. I will give you a scenario and ask you which one it is.</a:t>
-            </a:r>
-          </a:p>
-          <a:p/>
-          <a:p>
-            <a:r>
-              <a:t>And responsible use: test edges first, check a known answer, keep it advisory, no real</a:t>
-            </a:r>
-          </a:p>
-          <a:p>
-            <a:r>
-              <a:t>personal data.</a:t>
-            </a:r>
-          </a:p>
-          <a:p/>
-          <a:p>
-            <a:r>
-              <a:t>Photograph this slide.</a:t>
+              <a:t>[Circulate. Common problems: too ambitious a scope — tell them to cut it in half; and</a:t>
+            </a:r>
+          </a:p>
+          <a:p>
+            <a:r>
+              <a:t>forgetting to test the edges — remind them at the ten-minute mark. If nobody is building, work</a:t>
+            </a:r>
+          </a:p>
+          <a:p>
+            <a:r>
+              <a:t>through step two aloud for one example from each discipline present.]</a:t>
             </a:r>
           </a:p>
         </p:txBody>
@@ -1640,84 +1638,78 @@
           <a:lstStyle/>
           <a:p>
             <a:r>
-              <a:t>Four things.</a:t>
+              <a:t>Whether or not you built one, here's what typically happens.</a:t>
             </a:r>
           </a:p>
           <a:p/>
           <a:p>
             <a:r>
-              <a:t>You can build working software from a description, without writing code, and it usually</a:t>
-            </a:r>
-          </a:p>
-          <a:p>
-            <a:r>
-              <a:t>works. That's genuinely new and genuinely useful, and I don't want to be sour about it.</a:t>
+              <a:t>It worked, and faster than expected. That's the normal outcome and it isn't luck — it's the</a:t>
+            </a:r>
+          </a:p>
+          <a:p>
+            <a:r>
+              <a:t>well-trodden-ground effect we discussed. Don't over-update on it.</a:t>
             </a:r>
           </a:p>
           <a:p/>
           <a:p>
             <a:r>
-              <a:t>But it's next-token prediction where the tokens happen to be code. Everything from week three</a:t>
-            </a:r>
-          </a:p>
-          <a:p>
-            <a:r>
-              <a:t>still applies, including that nothing checks correctness.</a:t>
+              <a:t>It broke on empty input, or handled it in a way nobody would have deliberately chosen.</a:t>
             </a:r>
           </a:p>
           <a:p/>
           <a:p>
             <a:r>
-              <a:t>The surface is not evidence. Looking right and being right are different properties, and this</a:t>
-            </a:r>
-          </a:p>
-          <a:p>
-            <a:r>
-              <a:t>week they came apart more completely than anywhere else in the course, because you can't read</a:t>
-            </a:r>
-          </a:p>
-          <a:p>
-            <a:r>
-              <a:t>the thing you made.</a:t>
+              <a:t>Turkish characters caused a problem somewhere. Very common, and worth remembering as a</a:t>
+            </a:r>
+          </a:p>
+          <a:p>
+            <a:r>
+              <a:t>systematic issue rather than bad luck — a lot of generated code carries assumptions from</a:t>
+            </a:r>
+          </a:p>
+          <a:p>
+            <a:r>
+              <a:t>predominantly English source material.</a:t>
             </a:r>
           </a:p>
           <a:p/>
           <a:p>
             <a:r>
-              <a:t>So: test the edges, check a known case, keep it advisory.</a:t>
+              <a:t>And asking for a change worked, but occasionally broke something that had been working</a:t>
+            </a:r>
+          </a:p>
+          <a:p>
+            <a:r>
+              <a:t>before.</a:t>
             </a:r>
           </a:p>
           <a:p/>
           <a:p>
             <a:r>
-              <a:t>Next week, grounding. Today's tool works from what the model already knows. Next week we point</a:t>
-            </a:r>
-          </a:p>
-          <a:p>
-            <a:r>
-              <a:t>one at documents you choose — a guideline, a statute, a syllabus — so it answers from your</a:t>
-            </a:r>
-          </a:p>
-          <a:p>
-            <a:r>
-              <a:t>sources rather than from memory. And then we check whether it actually did, which turns out to</a:t>
-            </a:r>
-          </a:p>
-          <a:p>
-            <a:r>
-              <a:t>be the hard part.</a:t>
+              <a:t>That last one deserves its own name, in bold: you cannot see what a change affected. When you</a:t>
+            </a:r>
+          </a:p>
+          <a:p>
+            <a:r>
+              <a:t>modify code you can read, you can see the blast radius. When you ask for a modification in</a:t>
+            </a:r>
+          </a:p>
+          <a:p>
+            <a:r>
+              <a:t>plain language, you can't. Something three screens away may have changed.</a:t>
             </a:r>
           </a:p>
           <a:p/>
           <a:p>
             <a:r>
-              <a:t>Bring documents if you have some. I'll provide packs if you don't.</a:t>
-            </a:r>
-          </a:p>
-          <a:p/>
-          <a:p>
-            <a:r>
-              <a:t>Questions?</a:t>
+              <a:t>So: when you ask for a change, re-test the things that already worked. Every time. That's not</a:t>
+            </a:r>
+          </a:p>
+          <a:p>
+            <a:r>
+              <a:t>paranoia, it's the only compensation available for not being able to read the thing.</a:t>
             </a:r>
           </a:p>
         </p:txBody>
@@ -1787,72 +1779,79 @@
           <a:lstStyle/>
           <a:p>
             <a:r>
-              <a:t>Take questions here.</a:t>
+              <a:t>This is the slide that connects today to your exam, and I'll do one of these every build week.</a:t>
             </a:r>
           </a:p>
           <a:p/>
           <a:p>
             <a:r>
-              <a:t>Common ones:</a:t>
+              <a:t>Five things you must be able to define and diagnose.</a:t>
             </a:r>
           </a:p>
           <a:p/>
           <a:p>
             <a:r>
-              <a:t>"Can I use this for real work?" — For drafting and formatting, yes, with the four rules.</a:t>
-            </a:r>
-          </a:p>
-          <a:p>
-            <a:r>
-              <a:t>For anything where a wrong answer reaches a patient or client without a human in between, no.</a:t>
+              <a:t>What a Micro-Tool is: single-purpose, single-screen, generated from a description, no stored</a:t>
+            </a:r>
+          </a:p>
+          <a:p>
+            <a:r>
+              <a:t>data.</a:t>
             </a:r>
           </a:p>
           <a:p/>
           <a:p>
             <a:r>
-              <a:t>"Do I need to learn to code now?" — No. But notice what you gained by not being able to read</a:t>
-            </a:r>
-          </a:p>
-          <a:p>
-            <a:r>
-              <a:t>it: a permanent dependence on testing rather than inspection. That's a real trade, and it's</a:t>
-            </a:r>
-          </a:p>
-          <a:p>
-            <a:r>
-              <a:t>worth knowing you made it.</a:t>
+              <a:t>Why generated code is well predicted: it's highly patterned, abundantly available, and common</a:t>
+            </a:r>
+          </a:p>
+          <a:p>
+            <a:r>
+              <a:t>tasks recur almost identically. If an exam question asks why these tools succeed at ordinary</a:t>
+            </a:r>
+          </a:p>
+          <a:p>
+            <a:r>
+              <a:t>software and struggle with unusual requirements, that's the answer.</a:t>
             </a:r>
           </a:p>
           <a:p/>
           <a:p>
             <a:r>
-              <a:t>"What if my tool stops working later?" — Common with free tiers and hosted services. Keep the</a:t>
-            </a:r>
-          </a:p>
-          <a:p>
-            <a:r>
-              <a:t>description you used. Regenerating from the description is cheap; recovering a tool you can't</a:t>
-            </a:r>
-          </a:p>
-          <a:p>
-            <a:r>
-              <a:t>read isn't.</a:t>
+              <a:t>The verification gap. You can judge appearance; you cannot judge logic. The surface is not</a:t>
+            </a:r>
+          </a:p>
+          <a:p>
+            <a:r>
+              <a:t>evidence. Learn that sentence.</a:t>
             </a:r>
           </a:p>
           <a:p/>
           <a:p>
             <a:r>
-              <a:t>"Can it build something bigger?" — It can appear to. The failure modes get much harder to spot</a:t>
-            </a:r>
-          </a:p>
-          <a:p>
-            <a:r>
-              <a:t>as scope grows, and you have no way to inspect. That's exactly why the rule is one job, one</a:t>
-            </a:r>
-          </a:p>
-          <a:p>
-            <a:r>
-              <a:t>screen.</a:t>
+              <a:t>The three quiet failures, by name: wrong logic with right appearance; correct only for the</a:t>
+            </a:r>
+          </a:p>
+          <a:p>
+            <a:r>
+              <a:t>cases tried; silently discarded input. I will give you a scenario and ask you which one it is.</a:t>
+            </a:r>
+          </a:p>
+          <a:p/>
+          <a:p>
+            <a:r>
+              <a:t>And responsible use: test edges first, check a known answer, keep it advisory, no real</a:t>
+            </a:r>
+          </a:p>
+          <a:p>
+            <a:r>
+              <a:t>personal data.</a:t>
+            </a:r>
+          </a:p>
+          <a:p/>
+          <a:p>
+            <a:r>
+              <a:t>Photograph this slide.</a:t>
             </a:r>
           </a:p>
         </p:txBody>
@@ -1984,6 +1983,288 @@
           <a:p>
             <a:r>
               <a:t>every build week and I will.</a:t>
+            </a:r>
+          </a:p>
+        </p:txBody>
+      </p:sp>
+      <p:sp>
+        <p:nvSpPr>
+          <p:cNvPr id="4" name="Slide Number Placeholder 3"/>
+          <p:cNvSpPr>
+            <a:spLocks noGrp="1"/>
+          </p:cNvSpPr>
+          <p:nvPr>
+            <p:ph type="sldNum" idx="5" sz="quarter"/>
+          </p:nvPr>
+        </p:nvSpPr>
+        <p:spPr/>
+      </p:sp>
+    </p:spTree>
+  </p:cSld>
+  <p:clrMapOvr>
+    <a:masterClrMapping/>
+  </p:clrMapOvr>
+</p:notes>
+</file>
+
+<file path=ppt/notesSlides/notesSlide20.xml><?xml version="1.0" encoding="utf-8"?>
+<p:notes xmlns:a="http://schemas.openxmlformats.org/drawingml/2006/main" xmlns:p="http://schemas.openxmlformats.org/presentationml/2006/main" xmlns:r="http://schemas.openxmlformats.org/officeDocument/2006/relationships">
+  <p:cSld>
+    <p:spTree>
+      <p:nvGrpSpPr>
+        <p:cNvPr id="1" name=""/>
+        <p:cNvGrpSpPr/>
+        <p:nvPr/>
+      </p:nvGrpSpPr>
+      <p:grpSpPr>
+        <a:xfrm>
+          <a:off x="0" y="0"/>
+          <a:ext cx="0" cy="0"/>
+          <a:chOff x="0" y="0"/>
+          <a:chExt cx="0" cy="0"/>
+        </a:xfrm>
+      </p:grpSpPr>
+      <p:sp>
+        <p:nvSpPr>
+          <p:cNvPr id="2" name="Slide Image Placeholder 1"/>
+          <p:cNvSpPr>
+            <a:spLocks noGrp="1"/>
+          </p:cNvSpPr>
+          <p:nvPr>
+            <p:ph type="sldImg" idx="2"/>
+          </p:nvPr>
+        </p:nvSpPr>
+        <p:spPr/>
+      </p:sp>
+      <p:sp>
+        <p:nvSpPr>
+          <p:cNvPr id="3" name="Notes Placeholder 2"/>
+          <p:cNvSpPr>
+            <a:spLocks noGrp="1"/>
+          </p:cNvSpPr>
+          <p:nvPr>
+            <p:ph type="body" idx="3" sz="quarter"/>
+          </p:nvPr>
+        </p:nvSpPr>
+        <p:spPr/>
+        <p:txBody>
+          <a:bodyPr/>
+          <a:lstStyle/>
+          <a:p>
+            <a:r>
+              <a:t>Four things.</a:t>
+            </a:r>
+          </a:p>
+          <a:p/>
+          <a:p>
+            <a:r>
+              <a:t>You can build working software from a description, without writing code, and it usually</a:t>
+            </a:r>
+          </a:p>
+          <a:p>
+            <a:r>
+              <a:t>works. That's genuinely new and genuinely useful, and I don't want to be sour about it.</a:t>
+            </a:r>
+          </a:p>
+          <a:p/>
+          <a:p>
+            <a:r>
+              <a:t>But it's next-token prediction where the tokens happen to be code. Everything from week three</a:t>
+            </a:r>
+          </a:p>
+          <a:p>
+            <a:r>
+              <a:t>still applies, including that nothing checks correctness.</a:t>
+            </a:r>
+          </a:p>
+          <a:p/>
+          <a:p>
+            <a:r>
+              <a:t>The surface is not evidence. Looking right and being right are different properties, and this</a:t>
+            </a:r>
+          </a:p>
+          <a:p>
+            <a:r>
+              <a:t>week they came apart more completely than anywhere else in the course, because you can't read</a:t>
+            </a:r>
+          </a:p>
+          <a:p>
+            <a:r>
+              <a:t>the thing you made.</a:t>
+            </a:r>
+          </a:p>
+          <a:p/>
+          <a:p>
+            <a:r>
+              <a:t>So: test the edges, check a known case, keep it advisory.</a:t>
+            </a:r>
+          </a:p>
+          <a:p/>
+          <a:p>
+            <a:r>
+              <a:t>Next week, grounding. Today's tool works from what the model already knows. Next week we point</a:t>
+            </a:r>
+          </a:p>
+          <a:p>
+            <a:r>
+              <a:t>one at documents you choose — a guideline, a statute, a syllabus — so it answers from your</a:t>
+            </a:r>
+          </a:p>
+          <a:p>
+            <a:r>
+              <a:t>sources rather than from memory. And then we check whether it actually did, which turns out to</a:t>
+            </a:r>
+          </a:p>
+          <a:p>
+            <a:r>
+              <a:t>be the hard part.</a:t>
+            </a:r>
+          </a:p>
+          <a:p/>
+          <a:p>
+            <a:r>
+              <a:t>Bring documents if you have some. I'll provide packs if you don't.</a:t>
+            </a:r>
+          </a:p>
+          <a:p/>
+          <a:p>
+            <a:r>
+              <a:t>Questions?</a:t>
+            </a:r>
+          </a:p>
+        </p:txBody>
+      </p:sp>
+      <p:sp>
+        <p:nvSpPr>
+          <p:cNvPr id="4" name="Slide Number Placeholder 3"/>
+          <p:cNvSpPr>
+            <a:spLocks noGrp="1"/>
+          </p:cNvSpPr>
+          <p:nvPr>
+            <p:ph type="sldNum" idx="5" sz="quarter"/>
+          </p:nvPr>
+        </p:nvSpPr>
+        <p:spPr/>
+      </p:sp>
+    </p:spTree>
+  </p:cSld>
+  <p:clrMapOvr>
+    <a:masterClrMapping/>
+  </p:clrMapOvr>
+</p:notes>
+</file>
+
+<file path=ppt/notesSlides/notesSlide21.xml><?xml version="1.0" encoding="utf-8"?>
+<p:notes xmlns:a="http://schemas.openxmlformats.org/drawingml/2006/main" xmlns:p="http://schemas.openxmlformats.org/presentationml/2006/main" xmlns:r="http://schemas.openxmlformats.org/officeDocument/2006/relationships">
+  <p:cSld>
+    <p:spTree>
+      <p:nvGrpSpPr>
+        <p:cNvPr id="1" name=""/>
+        <p:cNvGrpSpPr/>
+        <p:nvPr/>
+      </p:nvGrpSpPr>
+      <p:grpSpPr>
+        <a:xfrm>
+          <a:off x="0" y="0"/>
+          <a:ext cx="0" cy="0"/>
+          <a:chOff x="0" y="0"/>
+          <a:chExt cx="0" cy="0"/>
+        </a:xfrm>
+      </p:grpSpPr>
+      <p:sp>
+        <p:nvSpPr>
+          <p:cNvPr id="2" name="Slide Image Placeholder 1"/>
+          <p:cNvSpPr>
+            <a:spLocks noGrp="1"/>
+          </p:cNvSpPr>
+          <p:nvPr>
+            <p:ph type="sldImg" idx="2"/>
+          </p:nvPr>
+        </p:nvSpPr>
+        <p:spPr/>
+      </p:sp>
+      <p:sp>
+        <p:nvSpPr>
+          <p:cNvPr id="3" name="Notes Placeholder 2"/>
+          <p:cNvSpPr>
+            <a:spLocks noGrp="1"/>
+          </p:cNvSpPr>
+          <p:nvPr>
+            <p:ph type="body" idx="3" sz="quarter"/>
+          </p:nvPr>
+        </p:nvSpPr>
+        <p:spPr/>
+        <p:txBody>
+          <a:bodyPr/>
+          <a:lstStyle/>
+          <a:p>
+            <a:r>
+              <a:t>Take questions here.</a:t>
+            </a:r>
+          </a:p>
+          <a:p/>
+          <a:p>
+            <a:r>
+              <a:t>Common ones:</a:t>
+            </a:r>
+          </a:p>
+          <a:p/>
+          <a:p>
+            <a:r>
+              <a:t>"Can I use this for real work?" — For drafting and formatting, yes, with the four rules.</a:t>
+            </a:r>
+          </a:p>
+          <a:p>
+            <a:r>
+              <a:t>For anything where a wrong answer reaches a patient or client without a human in between, no.</a:t>
+            </a:r>
+          </a:p>
+          <a:p/>
+          <a:p>
+            <a:r>
+              <a:t>"Do I need to learn to code now?" — No. But notice what you gained by not being able to read</a:t>
+            </a:r>
+          </a:p>
+          <a:p>
+            <a:r>
+              <a:t>it: a permanent dependence on testing rather than inspection. That's a real trade, and it's</a:t>
+            </a:r>
+          </a:p>
+          <a:p>
+            <a:r>
+              <a:t>worth knowing you made it.</a:t>
+            </a:r>
+          </a:p>
+          <a:p/>
+          <a:p>
+            <a:r>
+              <a:t>"What if my tool stops working later?" — Common with free tiers and hosted services. Keep the</a:t>
+            </a:r>
+          </a:p>
+          <a:p>
+            <a:r>
+              <a:t>description you used. Regenerating from the description is cheap; recovering a tool you can't</a:t>
+            </a:r>
+          </a:p>
+          <a:p>
+            <a:r>
+              <a:t>read isn't.</a:t>
+            </a:r>
+          </a:p>
+          <a:p/>
+          <a:p>
+            <a:r>
+              <a:t>"Can it build something bigger?" — It can appear to. The failure modes get much harder to spot</a:t>
+            </a:r>
+          </a:p>
+          <a:p>
+            <a:r>
+              <a:t>as scope grows, and you have no way to inspect. That's exactly why the rule is one job, one</a:t>
+            </a:r>
+          </a:p>
+          <a:p>
+            <a:r>
+              <a:t>screen.</a:t>
             </a:r>
           </a:p>
         </p:txBody>
@@ -6127,14 +6408,48 @@
       <p:grpSpPr/>
       <p:sp>
         <p:nvSpPr>
-          <p:cNvPr id="2" name="Rectangle 1"/>
+          <p:cNvPr id="2" name="TextBox 1"/>
+          <p:cNvSpPr txBox="1"/>
+          <p:nvPr/>
+        </p:nvSpPr>
+        <p:spPr>
+          <a:xfrm>
+            <a:off x="777240" y="566928"/>
+            <a:ext cx="10637215" cy="822960"/>
+          </a:xfrm>
+          <a:prstGeom prst="rect">
+            <a:avLst/>
+          </a:prstGeom>
+          <a:noFill/>
+        </p:spPr>
+        <p:txBody>
+          <a:bodyPr wrap="square" lIns="0" rIns="0" tIns="0" bIns="0">
+            <a:spAutoFit/>
+          </a:bodyPr>
+          <a:lstStyle/>
+          <a:p>
+            <a:r>
+              <a:rPr sz="3000" b="1" i="0">
+                <a:solidFill>
+                  <a:srgbClr val="1F2937"/>
+                </a:solidFill>
+                <a:latin typeface="Calibri Light"/>
+              </a:rPr>
+              <a:t>Candidates From Your Fields</a:t>
+            </a:r>
+          </a:p>
+        </p:txBody>
+      </p:sp>
+      <p:sp>
+        <p:nvSpPr>
+          <p:cNvPr id="3" name="Rectangle 2"/>
           <p:cNvSpPr/>
           <p:nvPr/>
         </p:nvSpPr>
         <p:spPr>
           <a:xfrm>
-            <a:off x="0" y="0"/>
-            <a:ext cx="292608" cy="6858000"/>
+            <a:off x="777240" y="1417320"/>
+            <a:ext cx="1051560" cy="38100"/>
           </a:xfrm>
           <a:prstGeom prst="rect">
             <a:avLst/>
@@ -6171,14 +6486,542 @@
       </p:sp>
       <p:sp>
         <p:nvSpPr>
-          <p:cNvPr id="3" name="TextBox 2"/>
+          <p:cNvPr id="4" name="Rounded Rectangle 3"/>
+          <p:cNvSpPr/>
+          <p:nvPr/>
+        </p:nvSpPr>
+        <p:spPr>
+          <a:xfrm>
+            <a:off x="777240" y="2057400"/>
+            <a:ext cx="3301898" cy="3200400"/>
+          </a:xfrm>
+          <a:prstGeom prst="roundRect">
+            <a:avLst>
+              <a:gd name="adj" fmla="val 10000"/>
+            </a:avLst>
+          </a:prstGeom>
+          <a:solidFill>
+            <a:srgbClr val="F1F5F9"/>
+          </a:solidFill>
+          <a:ln w="15875">
+            <a:solidFill>
+              <a:srgbClr val="D3DDE6"/>
+            </a:solidFill>
+          </a:ln>
+          <a:effectLst/>
+        </p:spPr>
+        <p:style>
+          <a:lnRef idx="1">
+            <a:schemeClr val="accent1"/>
+          </a:lnRef>
+          <a:fillRef idx="3">
+            <a:schemeClr val="accent1"/>
+          </a:fillRef>
+          <a:effectRef idx="2">
+            <a:schemeClr val="accent1"/>
+          </a:effectRef>
+          <a:fontRef idx="minor">
+            <a:schemeClr val="lt1"/>
+          </a:fontRef>
+        </p:style>
+        <p:txBody>
+          <a:bodyPr rtlCol="0" anchor="ctr"/>
+          <a:lstStyle/>
+          <a:p>
+            <a:pPr algn="ctr"/>
+          </a:p>
+        </p:txBody>
+      </p:sp>
+      <p:sp>
+        <p:nvSpPr>
+          <p:cNvPr id="5" name="Rectangle 4"/>
+          <p:cNvSpPr/>
+          <p:nvPr/>
+        </p:nvSpPr>
+        <p:spPr>
+          <a:xfrm>
+            <a:off x="978408" y="2331720"/>
+            <a:ext cx="640080" cy="38100"/>
+          </a:xfrm>
+          <a:prstGeom prst="rect">
+            <a:avLst/>
+          </a:prstGeom>
+          <a:solidFill>
+            <a:srgbClr val="0F766E"/>
+          </a:solidFill>
+          <a:ln>
+            <a:noFill/>
+          </a:ln>
+          <a:effectLst/>
+        </p:spPr>
+        <p:style>
+          <a:lnRef idx="1">
+            <a:schemeClr val="accent1"/>
+          </a:lnRef>
+          <a:fillRef idx="3">
+            <a:schemeClr val="accent1"/>
+          </a:fillRef>
+          <a:effectRef idx="2">
+            <a:schemeClr val="accent1"/>
+          </a:effectRef>
+          <a:fontRef idx="minor">
+            <a:schemeClr val="lt1"/>
+          </a:fontRef>
+        </p:style>
+        <p:txBody>
+          <a:bodyPr rtlCol="0" anchor="ctr"/>
+          <a:lstStyle/>
+          <a:p>
+            <a:pPr algn="ctr"/>
+          </a:p>
+        </p:txBody>
+      </p:sp>
+      <p:sp>
+        <p:nvSpPr>
+          <p:cNvPr id="6" name="TextBox 5"/>
           <p:cNvSpPr txBox="1"/>
           <p:nvPr/>
         </p:nvSpPr>
         <p:spPr>
           <a:xfrm>
-            <a:off x="1280160" y="2743200"/>
-            <a:ext cx="10058400" cy="457200"/>
+            <a:off x="978408" y="2560320"/>
+            <a:ext cx="2899562" cy="640080"/>
+          </a:xfrm>
+          <a:prstGeom prst="rect">
+            <a:avLst/>
+          </a:prstGeom>
+          <a:noFill/>
+        </p:spPr>
+        <p:txBody>
+          <a:bodyPr wrap="square" lIns="0" rIns="0" tIns="0" bIns="0" anchor="t">
+            <a:spAutoFit/>
+          </a:bodyPr>
+          <a:lstStyle/>
+          <a:p>
+            <a:pPr algn="l">
+              <a:lnSpc>
+                <a:spcPct val="105000"/>
+              </a:lnSpc>
+              <a:spcAft>
+                <a:spcPts val="200"/>
+              </a:spcAft>
+            </a:pPr>
+            <a:r>
+              <a:rPr sz="1800" b="1" i="0">
+                <a:solidFill>
+                  <a:srgbClr val="1F2937"/>
+                </a:solidFill>
+                <a:latin typeface="Calibri"/>
+              </a:rPr>
+              <a:t>Healthcare · Education</a:t>
+            </a:r>
+          </a:p>
+        </p:txBody>
+      </p:sp>
+      <p:sp>
+        <p:nvSpPr>
+          <p:cNvPr id="7" name="TextBox 6"/>
+          <p:cNvSpPr txBox="1"/>
+          <p:nvPr/>
+        </p:nvSpPr>
+        <p:spPr>
+          <a:xfrm>
+            <a:off x="978408" y="3246120"/>
+            <a:ext cx="2899562" cy="1737360"/>
+          </a:xfrm>
+          <a:prstGeom prst="rect">
+            <a:avLst/>
+          </a:prstGeom>
+          <a:noFill/>
+        </p:spPr>
+        <p:txBody>
+          <a:bodyPr wrap="square" lIns="0" rIns="0" tIns="0" bIns="0" anchor="t">
+            <a:spAutoFit/>
+          </a:bodyPr>
+          <a:lstStyle/>
+          <a:p>
+            <a:pPr algn="l">
+              <a:lnSpc>
+                <a:spcPct val="105000"/>
+              </a:lnSpc>
+              <a:spcAft>
+                <a:spcPts val="200"/>
+              </a:spcAft>
+            </a:pPr>
+            <a:r>
+              <a:rPr sz="1350" b="0" i="0">
+                <a:solidFill>
+                  <a:srgbClr val="333D4B"/>
+                </a:solidFill>
+                <a:latin typeface="Calibri"/>
+              </a:rPr>
+              <a:t>A dosage-schedule formatter that turns a prescription into a printable timetable. A rubric scorer that takes marks and produces standard feedback text. A reading-level checker for patient information.</a:t>
+            </a:r>
+          </a:p>
+        </p:txBody>
+      </p:sp>
+      <p:sp>
+        <p:nvSpPr>
+          <p:cNvPr id="8" name="Rounded Rectangle 7"/>
+          <p:cNvSpPr/>
+          <p:nvPr/>
+        </p:nvSpPr>
+        <p:spPr>
+          <a:xfrm>
+            <a:off x="4444898" y="2057400"/>
+            <a:ext cx="3301898" cy="3200400"/>
+          </a:xfrm>
+          <a:prstGeom prst="roundRect">
+            <a:avLst>
+              <a:gd name="adj" fmla="val 10000"/>
+            </a:avLst>
+          </a:prstGeom>
+          <a:solidFill>
+            <a:srgbClr val="F1F5F9"/>
+          </a:solidFill>
+          <a:ln w="15875">
+            <a:solidFill>
+              <a:srgbClr val="D3DDE6"/>
+            </a:solidFill>
+          </a:ln>
+          <a:effectLst/>
+        </p:spPr>
+        <p:style>
+          <a:lnRef idx="1">
+            <a:schemeClr val="accent1"/>
+          </a:lnRef>
+          <a:fillRef idx="3">
+            <a:schemeClr val="accent1"/>
+          </a:fillRef>
+          <a:effectRef idx="2">
+            <a:schemeClr val="accent1"/>
+          </a:effectRef>
+          <a:fontRef idx="minor">
+            <a:schemeClr val="lt1"/>
+          </a:fontRef>
+        </p:style>
+        <p:txBody>
+          <a:bodyPr rtlCol="0" anchor="ctr"/>
+          <a:lstStyle/>
+          <a:p>
+            <a:pPr algn="ctr"/>
+          </a:p>
+        </p:txBody>
+      </p:sp>
+      <p:sp>
+        <p:nvSpPr>
+          <p:cNvPr id="9" name="Rectangle 8"/>
+          <p:cNvSpPr/>
+          <p:nvPr/>
+        </p:nvSpPr>
+        <p:spPr>
+          <a:xfrm>
+            <a:off x="4646066" y="2331720"/>
+            <a:ext cx="640080" cy="38100"/>
+          </a:xfrm>
+          <a:prstGeom prst="rect">
+            <a:avLst/>
+          </a:prstGeom>
+          <a:solidFill>
+            <a:srgbClr val="0F766E"/>
+          </a:solidFill>
+          <a:ln>
+            <a:noFill/>
+          </a:ln>
+          <a:effectLst/>
+        </p:spPr>
+        <p:style>
+          <a:lnRef idx="1">
+            <a:schemeClr val="accent1"/>
+          </a:lnRef>
+          <a:fillRef idx="3">
+            <a:schemeClr val="accent1"/>
+          </a:fillRef>
+          <a:effectRef idx="2">
+            <a:schemeClr val="accent1"/>
+          </a:effectRef>
+          <a:fontRef idx="minor">
+            <a:schemeClr val="lt1"/>
+          </a:fontRef>
+        </p:style>
+        <p:txBody>
+          <a:bodyPr rtlCol="0" anchor="ctr"/>
+          <a:lstStyle/>
+          <a:p>
+            <a:pPr algn="ctr"/>
+          </a:p>
+        </p:txBody>
+      </p:sp>
+      <p:sp>
+        <p:nvSpPr>
+          <p:cNvPr id="10" name="TextBox 9"/>
+          <p:cNvSpPr txBox="1"/>
+          <p:nvPr/>
+        </p:nvSpPr>
+        <p:spPr>
+          <a:xfrm>
+            <a:off x="4646066" y="2560320"/>
+            <a:ext cx="2899562" cy="640080"/>
+          </a:xfrm>
+          <a:prstGeom prst="rect">
+            <a:avLst/>
+          </a:prstGeom>
+          <a:noFill/>
+        </p:spPr>
+        <p:txBody>
+          <a:bodyPr wrap="square" lIns="0" rIns="0" tIns="0" bIns="0" anchor="t">
+            <a:spAutoFit/>
+          </a:bodyPr>
+          <a:lstStyle/>
+          <a:p>
+            <a:pPr algn="l">
+              <a:lnSpc>
+                <a:spcPct val="105000"/>
+              </a:lnSpc>
+              <a:spcAft>
+                <a:spcPts val="200"/>
+              </a:spcAft>
+            </a:pPr>
+            <a:r>
+              <a:rPr sz="1800" b="1" i="0">
+                <a:solidFill>
+                  <a:srgbClr val="1F2937"/>
+                </a:solidFill>
+                <a:latin typeface="Calibri"/>
+              </a:rPr>
+              <a:t>Law · Business</a:t>
+            </a:r>
+          </a:p>
+        </p:txBody>
+      </p:sp>
+      <p:sp>
+        <p:nvSpPr>
+          <p:cNvPr id="11" name="TextBox 10"/>
+          <p:cNvSpPr txBox="1"/>
+          <p:nvPr/>
+        </p:nvSpPr>
+        <p:spPr>
+          <a:xfrm>
+            <a:off x="4646066" y="3246120"/>
+            <a:ext cx="2899562" cy="1737360"/>
+          </a:xfrm>
+          <a:prstGeom prst="rect">
+            <a:avLst/>
+          </a:prstGeom>
+          <a:noFill/>
+        </p:spPr>
+        <p:txBody>
+          <a:bodyPr wrap="square" lIns="0" rIns="0" tIns="0" bIns="0" anchor="t">
+            <a:spAutoFit/>
+          </a:bodyPr>
+          <a:lstStyle/>
+          <a:p>
+            <a:pPr algn="l">
+              <a:lnSpc>
+                <a:spcPct val="105000"/>
+              </a:lnSpc>
+              <a:spcAft>
+                <a:spcPts val="200"/>
+              </a:spcAft>
+            </a:pPr>
+            <a:r>
+              <a:rPr sz="1350" b="0" i="0">
+                <a:solidFill>
+                  <a:srgbClr val="333D4B"/>
+                </a:solidFill>
+                <a:latin typeface="Calibri"/>
+              </a:rPr>
+              <a:t>A clause checklist that confirms a draft contains your standard sections. A citation formatter. A meeting-note structurer that sorts free text into decisions, actions and open questions.</a:t>
+            </a:r>
+          </a:p>
+        </p:txBody>
+      </p:sp>
+      <p:sp>
+        <p:nvSpPr>
+          <p:cNvPr id="12" name="Rounded Rectangle 11"/>
+          <p:cNvSpPr/>
+          <p:nvPr/>
+        </p:nvSpPr>
+        <p:spPr>
+          <a:xfrm>
+            <a:off x="8112556" y="2057400"/>
+            <a:ext cx="3301898" cy="3200400"/>
+          </a:xfrm>
+          <a:prstGeom prst="roundRect">
+            <a:avLst>
+              <a:gd name="adj" fmla="val 10000"/>
+            </a:avLst>
+          </a:prstGeom>
+          <a:solidFill>
+            <a:srgbClr val="F1F5F9"/>
+          </a:solidFill>
+          <a:ln w="15875">
+            <a:solidFill>
+              <a:srgbClr val="D3DDE6"/>
+            </a:solidFill>
+          </a:ln>
+          <a:effectLst/>
+        </p:spPr>
+        <p:style>
+          <a:lnRef idx="1">
+            <a:schemeClr val="accent1"/>
+          </a:lnRef>
+          <a:fillRef idx="3">
+            <a:schemeClr val="accent1"/>
+          </a:fillRef>
+          <a:effectRef idx="2">
+            <a:schemeClr val="accent1"/>
+          </a:effectRef>
+          <a:fontRef idx="minor">
+            <a:schemeClr val="lt1"/>
+          </a:fontRef>
+        </p:style>
+        <p:txBody>
+          <a:bodyPr rtlCol="0" anchor="ctr"/>
+          <a:lstStyle/>
+          <a:p>
+            <a:pPr algn="ctr"/>
+          </a:p>
+        </p:txBody>
+      </p:sp>
+      <p:sp>
+        <p:nvSpPr>
+          <p:cNvPr id="13" name="Rectangle 12"/>
+          <p:cNvSpPr/>
+          <p:nvPr/>
+        </p:nvSpPr>
+        <p:spPr>
+          <a:xfrm>
+            <a:off x="8313724" y="2331720"/>
+            <a:ext cx="640080" cy="38100"/>
+          </a:xfrm>
+          <a:prstGeom prst="rect">
+            <a:avLst/>
+          </a:prstGeom>
+          <a:solidFill>
+            <a:srgbClr val="0F766E"/>
+          </a:solidFill>
+          <a:ln>
+            <a:noFill/>
+          </a:ln>
+          <a:effectLst/>
+        </p:spPr>
+        <p:style>
+          <a:lnRef idx="1">
+            <a:schemeClr val="accent1"/>
+          </a:lnRef>
+          <a:fillRef idx="3">
+            <a:schemeClr val="accent1"/>
+          </a:fillRef>
+          <a:effectRef idx="2">
+            <a:schemeClr val="accent1"/>
+          </a:effectRef>
+          <a:fontRef idx="minor">
+            <a:schemeClr val="lt1"/>
+          </a:fontRef>
+        </p:style>
+        <p:txBody>
+          <a:bodyPr rtlCol="0" anchor="ctr"/>
+          <a:lstStyle/>
+          <a:p>
+            <a:pPr algn="ctr"/>
+          </a:p>
+        </p:txBody>
+      </p:sp>
+      <p:sp>
+        <p:nvSpPr>
+          <p:cNvPr id="14" name="TextBox 13"/>
+          <p:cNvSpPr txBox="1"/>
+          <p:nvPr/>
+        </p:nvSpPr>
+        <p:spPr>
+          <a:xfrm>
+            <a:off x="8313724" y="2560320"/>
+            <a:ext cx="2899562" cy="640080"/>
+          </a:xfrm>
+          <a:prstGeom prst="rect">
+            <a:avLst/>
+          </a:prstGeom>
+          <a:noFill/>
+        </p:spPr>
+        <p:txBody>
+          <a:bodyPr wrap="square" lIns="0" rIns="0" tIns="0" bIns="0" anchor="t">
+            <a:spAutoFit/>
+          </a:bodyPr>
+          <a:lstStyle/>
+          <a:p>
+            <a:pPr algn="l">
+              <a:lnSpc>
+                <a:spcPct val="105000"/>
+              </a:lnSpc>
+              <a:spcAft>
+                <a:spcPts val="200"/>
+              </a:spcAft>
+            </a:pPr>
+            <a:r>
+              <a:rPr sz="1800" b="1" i="0">
+                <a:solidFill>
+                  <a:srgbClr val="1F2937"/>
+                </a:solidFill>
+                <a:latin typeface="Calibri"/>
+              </a:rPr>
+              <a:t>Engineering · Any field</a:t>
+            </a:r>
+          </a:p>
+        </p:txBody>
+      </p:sp>
+      <p:sp>
+        <p:nvSpPr>
+          <p:cNvPr id="15" name="TextBox 14"/>
+          <p:cNvSpPr txBox="1"/>
+          <p:nvPr/>
+        </p:nvSpPr>
+        <p:spPr>
+          <a:xfrm>
+            <a:off x="8313724" y="3246120"/>
+            <a:ext cx="2899562" cy="1737360"/>
+          </a:xfrm>
+          <a:prstGeom prst="rect">
+            <a:avLst/>
+          </a:prstGeom>
+          <a:noFill/>
+        </p:spPr>
+        <p:txBody>
+          <a:bodyPr wrap="square" lIns="0" rIns="0" tIns="0" bIns="0" anchor="t">
+            <a:spAutoFit/>
+          </a:bodyPr>
+          <a:lstStyle/>
+          <a:p>
+            <a:pPr algn="l">
+              <a:lnSpc>
+                <a:spcPct val="105000"/>
+              </a:lnSpc>
+              <a:spcAft>
+                <a:spcPts val="200"/>
+              </a:spcAft>
+            </a:pPr>
+            <a:r>
+              <a:rPr sz="1350" b="0" i="0">
+                <a:solidFill>
+                  <a:srgbClr val="333D4B"/>
+                </a:solidFill>
+                <a:latin typeface="Calibri"/>
+              </a:rPr>
+              <a:t>A unit converter for the specific quantities your lab uses. A checklist generator for a recurring procedure. A form that turns five fields into a correctly worded standard message.</a:t>
+            </a:r>
+          </a:p>
+        </p:txBody>
+      </p:sp>
+      <p:sp>
+        <p:nvSpPr>
+          <p:cNvPr id="16" name="TextBox 15"/>
+          <p:cNvSpPr txBox="1"/>
+          <p:nvPr/>
+        </p:nvSpPr>
+        <p:spPr>
+          <a:xfrm>
+            <a:off x="777240" y="6355080"/>
+            <a:ext cx="10637215" cy="274320"/>
           </a:xfrm>
           <a:prstGeom prst="rect">
             <a:avLst/>
@@ -6192,27 +7035,27 @@
           <a:lstStyle/>
           <a:p>
             <a:r>
-              <a:rPr sz="1400" b="1" i="0">
-                <a:solidFill>
-                  <a:srgbClr val="0F766E"/>
-                </a:solidFill>
-                <a:latin typeface="Calibri"/>
-              </a:rPr>
-              <a:t>PART 3</a:t>
-            </a:r>
-          </a:p>
-        </p:txBody>
-      </p:sp>
-      <p:sp>
-        <p:nvSpPr>
-          <p:cNvPr id="4" name="TextBox 3"/>
+              <a:rPr sz="1000" b="0" i="0">
+                <a:solidFill>
+                  <a:srgbClr val="6B7787"/>
+                </a:solidFill>
+                <a:latin typeface="Calibri"/>
+              </a:rPr>
+              <a:t>Week 6  ·  Prompt Engineering and Large Language Models</a:t>
+            </a:r>
+          </a:p>
+        </p:txBody>
+      </p:sp>
+      <p:sp>
+        <p:nvSpPr>
+          <p:cNvPr id="17" name="TextBox 16"/>
           <p:cNvSpPr txBox="1"/>
           <p:nvPr/>
         </p:nvSpPr>
         <p:spPr>
           <a:xfrm>
-            <a:off x="1280160" y="3200400"/>
-            <a:ext cx="10058400" cy="1097280"/>
+            <a:off x="10500055" y="6355080"/>
+            <a:ext cx="914400" cy="274320"/>
           </a:xfrm>
           <a:prstGeom prst="rect">
             <a:avLst/>
@@ -6225,14 +7068,15 @@
           </a:bodyPr>
           <a:lstStyle/>
           <a:p>
-            <a:r>
-              <a:rPr sz="3400" b="1" i="0">
-                <a:solidFill>
-                  <a:srgbClr val="1F2937"/>
-                </a:solidFill>
-                <a:latin typeface="Calibri Light"/>
-              </a:rPr>
-              <a:t>Where It Breaks</a:t>
+            <a:pPr algn="r"/>
+            <a:r>
+              <a:rPr sz="1000" b="0" i="0">
+                <a:solidFill>
+                  <a:srgbClr val="6B7787"/>
+                </a:solidFill>
+                <a:latin typeface="Calibri"/>
+              </a:rPr>
+              <a:t>10</a:t>
             </a:r>
           </a:p>
         </p:txBody>
@@ -6257,45 +7101,35 @@
       <p:grpSpPr/>
       <p:sp>
         <p:nvSpPr>
-          <p:cNvPr id="2" name="Rectangle 1"/>
-          <p:cNvSpPr/>
-          <p:nvPr/>
-        </p:nvSpPr>
-        <p:spPr>
-          <a:xfrm>
-            <a:off x="0" y="0"/>
-            <a:ext cx="12191695" cy="6858000"/>
+          <p:cNvPr id="2" name="TextBox 1"/>
+          <p:cNvSpPr txBox="1"/>
+          <p:nvPr/>
+        </p:nvSpPr>
+        <p:spPr>
+          <a:xfrm>
+            <a:off x="777240" y="566928"/>
+            <a:ext cx="10637215" cy="822960"/>
           </a:xfrm>
           <a:prstGeom prst="rect">
             <a:avLst/>
           </a:prstGeom>
-          <a:solidFill>
-            <a:srgbClr val="F1F5F9"/>
-          </a:solidFill>
-          <a:ln>
-            <a:noFill/>
-          </a:ln>
-          <a:effectLst/>
-        </p:spPr>
-        <p:style>
-          <a:lnRef idx="1">
-            <a:schemeClr val="accent1"/>
-          </a:lnRef>
-          <a:fillRef idx="3">
-            <a:schemeClr val="accent1"/>
-          </a:fillRef>
-          <a:effectRef idx="2">
-            <a:schemeClr val="accent1"/>
-          </a:effectRef>
-          <a:fontRef idx="minor">
-            <a:schemeClr val="lt1"/>
-          </a:fontRef>
-        </p:style>
-        <p:txBody>
-          <a:bodyPr rtlCol="0" anchor="ctr"/>
-          <a:lstStyle/>
-          <a:p>
-            <a:pPr algn="ctr"/>
+          <a:noFill/>
+        </p:spPr>
+        <p:txBody>
+          <a:bodyPr wrap="square" lIns="0" rIns="0" tIns="0" bIns="0">
+            <a:spAutoFit/>
+          </a:bodyPr>
+          <a:lstStyle/>
+          <a:p>
+            <a:r>
+              <a:rPr sz="3000" b="1" i="0">
+                <a:solidFill>
+                  <a:srgbClr val="1F2937"/>
+                </a:solidFill>
+                <a:latin typeface="Calibri Light"/>
+              </a:rPr>
+              <a:t>When the First Attempt Is Wrong</a:t>
+            </a:r>
           </a:p>
         </p:txBody>
       </p:sp>
@@ -6307,8 +7141,8 @@
         </p:nvSpPr>
         <p:spPr>
           <a:xfrm>
-            <a:off x="777240" y="2331720"/>
-            <a:ext cx="1051560" cy="50800"/>
+            <a:off x="777240" y="1417320"/>
+            <a:ext cx="1051560" cy="38100"/>
           </a:xfrm>
           <a:prstGeom prst="rect">
             <a:avLst/>
@@ -6351,8 +7185,8 @@
         </p:nvSpPr>
         <p:spPr>
           <a:xfrm>
-            <a:off x="777240" y="2697480"/>
-            <a:ext cx="10241280" cy="1828800"/>
+            <a:off x="777240" y="1783080"/>
+            <a:ext cx="10637215" cy="4343400"/>
           </a:xfrm>
           <a:prstGeom prst="rect">
             <a:avLst/>
@@ -6365,14 +7199,155 @@
           </a:bodyPr>
           <a:lstStyle/>
           <a:p>
-            <a:r>
-              <a:rPr sz="3200" b="1" i="0">
+            <a:pPr>
+              <a:lnSpc>
+                <a:spcPct val="115000"/>
+              </a:lnSpc>
+              <a:spcAft>
+                <a:spcPts val="1000"/>
+              </a:spcAft>
+            </a:pPr>
+            <a:r>
+              <a:rPr sz="1900" b="1" i="0">
                 <a:solidFill>
                   <a:srgbClr val="1F2937"/>
                 </a:solidFill>
-                <a:latin typeface="Calibri Light"/>
-              </a:rPr>
-              <a:t>You can see whether it looks right. You cannot see whether it is right.</a:t>
+                <a:latin typeface="Calibri"/>
+              </a:rPr>
+              <a:t>•  Describe the behaviour you want, not the code you imagine.</a:t>
+            </a:r>
+          </a:p>
+          <a:p>
+            <a:pPr lvl="1">
+              <a:lnSpc>
+                <a:spcPct val="115000"/>
+              </a:lnSpc>
+              <a:spcAft>
+                <a:spcPts val="500"/>
+              </a:spcAft>
+            </a:pPr>
+            <a:r>
+              <a:rPr sz="1600" b="0" i="0">
+                <a:solidFill>
+                  <a:srgbClr val="333D4B"/>
+                </a:solidFill>
+                <a:latin typeface="Calibri"/>
+              </a:rPr>
+              <a:t>—  "The date should show as 15 March 2027, not 2027-03-15" — not "change the date format function"</a:t>
+            </a:r>
+          </a:p>
+          <a:p>
+            <a:pPr>
+              <a:lnSpc>
+                <a:spcPct val="115000"/>
+              </a:lnSpc>
+              <a:spcAft>
+                <a:spcPts val="1000"/>
+              </a:spcAft>
+            </a:pPr>
+            <a:r>
+              <a:rPr sz="1900" b="1" i="0">
+                <a:solidFill>
+                  <a:srgbClr val="1F2937"/>
+                </a:solidFill>
+                <a:latin typeface="Calibri"/>
+              </a:rPr>
+              <a:t>•  Give a concrete failing example.</a:t>
+            </a:r>
+          </a:p>
+          <a:p>
+            <a:pPr lvl="1">
+              <a:lnSpc>
+                <a:spcPct val="115000"/>
+              </a:lnSpc>
+              <a:spcAft>
+                <a:spcPts val="500"/>
+              </a:spcAft>
+            </a:pPr>
+            <a:r>
+              <a:rPr sz="1600" b="0" i="0">
+                <a:solidFill>
+                  <a:srgbClr val="333D4B"/>
+                </a:solidFill>
+                <a:latin typeface="Calibri"/>
+              </a:rPr>
+              <a:t>—  "When I enter a name with an apostrophe, the output is blank. It should show the name."</a:t>
+            </a:r>
+          </a:p>
+          <a:p>
+            <a:pPr>
+              <a:lnSpc>
+                <a:spcPct val="115000"/>
+              </a:lnSpc>
+              <a:spcAft>
+                <a:spcPts val="1000"/>
+              </a:spcAft>
+            </a:pPr>
+            <a:r>
+              <a:rPr sz="1900" b="1" i="0">
+                <a:solidFill>
+                  <a:srgbClr val="1F2937"/>
+                </a:solidFill>
+                <a:latin typeface="Calibri"/>
+              </a:rPr>
+              <a:t>•  Change one thing at a time.</a:t>
+            </a:r>
+          </a:p>
+          <a:p>
+            <a:pPr lvl="1">
+              <a:lnSpc>
+                <a:spcPct val="115000"/>
+              </a:lnSpc>
+              <a:spcAft>
+                <a:spcPts val="500"/>
+              </a:spcAft>
+            </a:pPr>
+            <a:r>
+              <a:rPr sz="1600" b="0" i="0">
+                <a:solidFill>
+                  <a:srgbClr val="333D4B"/>
+                </a:solidFill>
+                <a:latin typeface="Calibri"/>
+              </a:rPr>
+              <a:t>—  Same reason as Week 4 — otherwise you cannot tell which change fixed it, or what it broke.</a:t>
+            </a:r>
+          </a:p>
+          <a:p>
+            <a:pPr>
+              <a:lnSpc>
+                <a:spcPct val="115000"/>
+              </a:lnSpc>
+              <a:spcAft>
+                <a:spcPts val="1000"/>
+              </a:spcAft>
+            </a:pPr>
+            <a:r>
+              <a:rPr sz="1900" b="1" i="0">
+                <a:solidFill>
+                  <a:srgbClr val="1F2937"/>
+                </a:solidFill>
+                <a:latin typeface="Calibri"/>
+              </a:rPr>
+              <a:t>•  Re-test what already worked.</a:t>
+            </a:r>
+          </a:p>
+          <a:p>
+            <a:pPr lvl="1">
+              <a:lnSpc>
+                <a:spcPct val="115000"/>
+              </a:lnSpc>
+              <a:spcAft>
+                <a:spcPts val="500"/>
+              </a:spcAft>
+            </a:pPr>
+            <a:r>
+              <a:rPr sz="1600" b="0" i="0">
+                <a:solidFill>
+                  <a:srgbClr val="333D4B"/>
+                </a:solidFill>
+                <a:latin typeface="Calibri"/>
+              </a:rPr>
+              <a:t>—  You cannot see what a change affected. This is the compensation for not reading the code.</a:t>
             </a:r>
           </a:p>
         </p:txBody>
@@ -6385,8 +7360,8 @@
         </p:nvSpPr>
         <p:spPr>
           <a:xfrm>
-            <a:off x="777240" y="4434840"/>
-            <a:ext cx="10241280" cy="731520"/>
+            <a:off x="777240" y="6355080"/>
+            <a:ext cx="10637215" cy="274320"/>
           </a:xfrm>
           <a:prstGeom prst="rect">
             <a:avLst/>
@@ -6400,13 +7375,13 @@
           <a:lstStyle/>
           <a:p>
             <a:r>
-              <a:rPr sz="1800" b="0" i="0">
-                <a:solidFill>
-                  <a:srgbClr val="333D4B"/>
-                </a:solidFill>
-                <a:latin typeface="Calibri"/>
-              </a:rPr>
-              <a:t>This is the same gap as Week 1 — but now the fluent, confident, wrong thing is software.</a:t>
+              <a:rPr sz="1000" b="0" i="0">
+                <a:solidFill>
+                  <a:srgbClr val="6B7787"/>
+                </a:solidFill>
+                <a:latin typeface="Calibri"/>
+              </a:rPr>
+              <a:t>Week 6  ·  Prompt Engineering and Large Language Models</a:t>
             </a:r>
           </a:p>
         </p:txBody>
@@ -6414,40 +7389,6 @@
       <p:sp>
         <p:nvSpPr>
           <p:cNvPr id="6" name="TextBox 5"/>
-          <p:cNvSpPr txBox="1"/>
-          <p:nvPr/>
-        </p:nvSpPr>
-        <p:spPr>
-          <a:xfrm>
-            <a:off x="777240" y="6355080"/>
-            <a:ext cx="10637215" cy="274320"/>
-          </a:xfrm>
-          <a:prstGeom prst="rect">
-            <a:avLst/>
-          </a:prstGeom>
-          <a:noFill/>
-        </p:spPr>
-        <p:txBody>
-          <a:bodyPr wrap="square" lIns="0" rIns="0" tIns="0" bIns="0">
-            <a:spAutoFit/>
-          </a:bodyPr>
-          <a:lstStyle/>
-          <a:p>
-            <a:r>
-              <a:rPr sz="1000" b="0" i="0">
-                <a:solidFill>
-                  <a:srgbClr val="6B7787"/>
-                </a:solidFill>
-                <a:latin typeface="Calibri"/>
-              </a:rPr>
-              <a:t>Week 6  ·  Prompt Engineering and Large Language Models</a:t>
-            </a:r>
-          </a:p>
-        </p:txBody>
-      </p:sp>
-      <p:sp>
-        <p:nvSpPr>
-          <p:cNvPr id="7" name="TextBox 6"/>
           <p:cNvSpPr txBox="1"/>
           <p:nvPr/>
         </p:nvSpPr>
@@ -6500,48 +7441,14 @@
       <p:grpSpPr/>
       <p:sp>
         <p:nvSpPr>
-          <p:cNvPr id="2" name="TextBox 1"/>
-          <p:cNvSpPr txBox="1"/>
-          <p:nvPr/>
-        </p:nvSpPr>
-        <p:spPr>
-          <a:xfrm>
-            <a:off x="777240" y="566928"/>
-            <a:ext cx="10637215" cy="822960"/>
-          </a:xfrm>
-          <a:prstGeom prst="rect">
-            <a:avLst/>
-          </a:prstGeom>
-          <a:noFill/>
-        </p:spPr>
-        <p:txBody>
-          <a:bodyPr wrap="square" lIns="0" rIns="0" tIns="0" bIns="0">
-            <a:spAutoFit/>
-          </a:bodyPr>
-          <a:lstStyle/>
-          <a:p>
-            <a:r>
-              <a:rPr sz="3000" b="1" i="0">
-                <a:solidFill>
-                  <a:srgbClr val="1F2937"/>
-                </a:solidFill>
-                <a:latin typeface="Calibri Light"/>
-              </a:rPr>
-              <a:t>Three Ways a Micro-Tool Fails Quietly</a:t>
-            </a:r>
-          </a:p>
-        </p:txBody>
-      </p:sp>
-      <p:sp>
-        <p:nvSpPr>
-          <p:cNvPr id="3" name="Rectangle 2"/>
+          <p:cNvPr id="2" name="Rectangle 1"/>
           <p:cNvSpPr/>
           <p:nvPr/>
         </p:nvSpPr>
         <p:spPr>
           <a:xfrm>
-            <a:off x="777240" y="1417320"/>
-            <a:ext cx="1051560" cy="38100"/>
+            <a:off x="0" y="0"/>
+            <a:ext cx="292608" cy="6858000"/>
           </a:xfrm>
           <a:prstGeom prst="rect">
             <a:avLst/>
@@ -6578,542 +7485,14 @@
       </p:sp>
       <p:sp>
         <p:nvSpPr>
-          <p:cNvPr id="4" name="Rounded Rectangle 3"/>
-          <p:cNvSpPr/>
-          <p:nvPr/>
-        </p:nvSpPr>
-        <p:spPr>
-          <a:xfrm>
-            <a:off x="777240" y="2057400"/>
-            <a:ext cx="3301898" cy="3200400"/>
-          </a:xfrm>
-          <a:prstGeom prst="roundRect">
-            <a:avLst>
-              <a:gd name="adj" fmla="val 10000"/>
-            </a:avLst>
-          </a:prstGeom>
-          <a:solidFill>
-            <a:srgbClr val="F1F5F9"/>
-          </a:solidFill>
-          <a:ln w="15875">
-            <a:solidFill>
-              <a:srgbClr val="D3DDE6"/>
-            </a:solidFill>
-          </a:ln>
-          <a:effectLst/>
-        </p:spPr>
-        <p:style>
-          <a:lnRef idx="1">
-            <a:schemeClr val="accent1"/>
-          </a:lnRef>
-          <a:fillRef idx="3">
-            <a:schemeClr val="accent1"/>
-          </a:fillRef>
-          <a:effectRef idx="2">
-            <a:schemeClr val="accent1"/>
-          </a:effectRef>
-          <a:fontRef idx="minor">
-            <a:schemeClr val="lt1"/>
-          </a:fontRef>
-        </p:style>
-        <p:txBody>
-          <a:bodyPr rtlCol="0" anchor="ctr"/>
-          <a:lstStyle/>
-          <a:p>
-            <a:pPr algn="ctr"/>
-          </a:p>
-        </p:txBody>
-      </p:sp>
-      <p:sp>
-        <p:nvSpPr>
-          <p:cNvPr id="5" name="Rectangle 4"/>
-          <p:cNvSpPr/>
-          <p:nvPr/>
-        </p:nvSpPr>
-        <p:spPr>
-          <a:xfrm>
-            <a:off x="978408" y="2331720"/>
-            <a:ext cx="640080" cy="38100"/>
-          </a:xfrm>
-          <a:prstGeom prst="rect">
-            <a:avLst/>
-          </a:prstGeom>
-          <a:solidFill>
-            <a:srgbClr val="0F766E"/>
-          </a:solidFill>
-          <a:ln>
-            <a:noFill/>
-          </a:ln>
-          <a:effectLst/>
-        </p:spPr>
-        <p:style>
-          <a:lnRef idx="1">
-            <a:schemeClr val="accent1"/>
-          </a:lnRef>
-          <a:fillRef idx="3">
-            <a:schemeClr val="accent1"/>
-          </a:fillRef>
-          <a:effectRef idx="2">
-            <a:schemeClr val="accent1"/>
-          </a:effectRef>
-          <a:fontRef idx="minor">
-            <a:schemeClr val="lt1"/>
-          </a:fontRef>
-        </p:style>
-        <p:txBody>
-          <a:bodyPr rtlCol="0" anchor="ctr"/>
-          <a:lstStyle/>
-          <a:p>
-            <a:pPr algn="ctr"/>
-          </a:p>
-        </p:txBody>
-      </p:sp>
-      <p:sp>
-        <p:nvSpPr>
-          <p:cNvPr id="6" name="TextBox 5"/>
+          <p:cNvPr id="3" name="TextBox 2"/>
           <p:cNvSpPr txBox="1"/>
           <p:nvPr/>
         </p:nvSpPr>
         <p:spPr>
           <a:xfrm>
-            <a:off x="978408" y="2560320"/>
-            <a:ext cx="2899562" cy="640080"/>
-          </a:xfrm>
-          <a:prstGeom prst="rect">
-            <a:avLst/>
-          </a:prstGeom>
-          <a:noFill/>
-        </p:spPr>
-        <p:txBody>
-          <a:bodyPr wrap="square" lIns="0" rIns="0" tIns="0" bIns="0" anchor="t">
-            <a:spAutoFit/>
-          </a:bodyPr>
-          <a:lstStyle/>
-          <a:p>
-            <a:pPr algn="l">
-              <a:lnSpc>
-                <a:spcPct val="105000"/>
-              </a:lnSpc>
-              <a:spcAft>
-                <a:spcPts val="200"/>
-              </a:spcAft>
-            </a:pPr>
-            <a:r>
-              <a:rPr sz="1800" b="1" i="0">
-                <a:solidFill>
-                  <a:srgbClr val="1F2937"/>
-                </a:solidFill>
-                <a:latin typeface="Calibri"/>
-              </a:rPr>
-              <a:t>Wrong logic, right appearance</a:t>
-            </a:r>
-          </a:p>
-        </p:txBody>
-      </p:sp>
-      <p:sp>
-        <p:nvSpPr>
-          <p:cNvPr id="7" name="TextBox 6"/>
-          <p:cNvSpPr txBox="1"/>
-          <p:nvPr/>
-        </p:nvSpPr>
-        <p:spPr>
-          <a:xfrm>
-            <a:off x="978408" y="3246120"/>
-            <a:ext cx="2899562" cy="1737360"/>
-          </a:xfrm>
-          <a:prstGeom prst="rect">
-            <a:avLst/>
-          </a:prstGeom>
-          <a:noFill/>
-        </p:spPr>
-        <p:txBody>
-          <a:bodyPr wrap="square" lIns="0" rIns="0" tIns="0" bIns="0" anchor="t">
-            <a:spAutoFit/>
-          </a:bodyPr>
-          <a:lstStyle/>
-          <a:p>
-            <a:pPr algn="l">
-              <a:lnSpc>
-                <a:spcPct val="105000"/>
-              </a:lnSpc>
-              <a:spcAft>
-                <a:spcPts val="200"/>
-              </a:spcAft>
-            </a:pPr>
-            <a:r>
-              <a:rPr sz="1350" b="0" i="0">
-                <a:solidFill>
-                  <a:srgbClr val="333D4B"/>
-                </a:solidFill>
-                <a:latin typeface="Calibri"/>
-              </a:rPr>
-              <a:t>A calculation that is subtly wrong — a rounding rule, an off-by-one in a date, the wrong threshold. The interface looks perfect. The number is wrong every single time, consistently, which makes it look reliable.</a:t>
-            </a:r>
-          </a:p>
-        </p:txBody>
-      </p:sp>
-      <p:sp>
-        <p:nvSpPr>
-          <p:cNvPr id="8" name="Rounded Rectangle 7"/>
-          <p:cNvSpPr/>
-          <p:nvPr/>
-        </p:nvSpPr>
-        <p:spPr>
-          <a:xfrm>
-            <a:off x="4444898" y="2057400"/>
-            <a:ext cx="3301898" cy="3200400"/>
-          </a:xfrm>
-          <a:prstGeom prst="roundRect">
-            <a:avLst>
-              <a:gd name="adj" fmla="val 10000"/>
-            </a:avLst>
-          </a:prstGeom>
-          <a:solidFill>
-            <a:srgbClr val="F1F5F9"/>
-          </a:solidFill>
-          <a:ln w="15875">
-            <a:solidFill>
-              <a:srgbClr val="D3DDE6"/>
-            </a:solidFill>
-          </a:ln>
-          <a:effectLst/>
-        </p:spPr>
-        <p:style>
-          <a:lnRef idx="1">
-            <a:schemeClr val="accent1"/>
-          </a:lnRef>
-          <a:fillRef idx="3">
-            <a:schemeClr val="accent1"/>
-          </a:fillRef>
-          <a:effectRef idx="2">
-            <a:schemeClr val="accent1"/>
-          </a:effectRef>
-          <a:fontRef idx="minor">
-            <a:schemeClr val="lt1"/>
-          </a:fontRef>
-        </p:style>
-        <p:txBody>
-          <a:bodyPr rtlCol="0" anchor="ctr"/>
-          <a:lstStyle/>
-          <a:p>
-            <a:pPr algn="ctr"/>
-          </a:p>
-        </p:txBody>
-      </p:sp>
-      <p:sp>
-        <p:nvSpPr>
-          <p:cNvPr id="9" name="Rectangle 8"/>
-          <p:cNvSpPr/>
-          <p:nvPr/>
-        </p:nvSpPr>
-        <p:spPr>
-          <a:xfrm>
-            <a:off x="4646066" y="2331720"/>
-            <a:ext cx="640080" cy="38100"/>
-          </a:xfrm>
-          <a:prstGeom prst="rect">
-            <a:avLst/>
-          </a:prstGeom>
-          <a:solidFill>
-            <a:srgbClr val="0F766E"/>
-          </a:solidFill>
-          <a:ln>
-            <a:noFill/>
-          </a:ln>
-          <a:effectLst/>
-        </p:spPr>
-        <p:style>
-          <a:lnRef idx="1">
-            <a:schemeClr val="accent1"/>
-          </a:lnRef>
-          <a:fillRef idx="3">
-            <a:schemeClr val="accent1"/>
-          </a:fillRef>
-          <a:effectRef idx="2">
-            <a:schemeClr val="accent1"/>
-          </a:effectRef>
-          <a:fontRef idx="minor">
-            <a:schemeClr val="lt1"/>
-          </a:fontRef>
-        </p:style>
-        <p:txBody>
-          <a:bodyPr rtlCol="0" anchor="ctr"/>
-          <a:lstStyle/>
-          <a:p>
-            <a:pPr algn="ctr"/>
-          </a:p>
-        </p:txBody>
-      </p:sp>
-      <p:sp>
-        <p:nvSpPr>
-          <p:cNvPr id="10" name="TextBox 9"/>
-          <p:cNvSpPr txBox="1"/>
-          <p:nvPr/>
-        </p:nvSpPr>
-        <p:spPr>
-          <a:xfrm>
-            <a:off x="4646066" y="2560320"/>
-            <a:ext cx="2899562" cy="640080"/>
-          </a:xfrm>
-          <a:prstGeom prst="rect">
-            <a:avLst/>
-          </a:prstGeom>
-          <a:noFill/>
-        </p:spPr>
-        <p:txBody>
-          <a:bodyPr wrap="square" lIns="0" rIns="0" tIns="0" bIns="0" anchor="t">
-            <a:spAutoFit/>
-          </a:bodyPr>
-          <a:lstStyle/>
-          <a:p>
-            <a:pPr algn="l">
-              <a:lnSpc>
-                <a:spcPct val="105000"/>
-              </a:lnSpc>
-              <a:spcAft>
-                <a:spcPts val="200"/>
-              </a:spcAft>
-            </a:pPr>
-            <a:r>
-              <a:rPr sz="1800" b="1" i="0">
-                <a:solidFill>
-                  <a:srgbClr val="1F2937"/>
-                </a:solidFill>
-                <a:latin typeface="Calibri"/>
-              </a:rPr>
-              <a:t>Correct for the cases you tried</a:t>
-            </a:r>
-          </a:p>
-        </p:txBody>
-      </p:sp>
-      <p:sp>
-        <p:nvSpPr>
-          <p:cNvPr id="11" name="TextBox 10"/>
-          <p:cNvSpPr txBox="1"/>
-          <p:nvPr/>
-        </p:nvSpPr>
-        <p:spPr>
-          <a:xfrm>
-            <a:off x="4646066" y="3246120"/>
-            <a:ext cx="2899562" cy="1737360"/>
-          </a:xfrm>
-          <a:prstGeom prst="rect">
-            <a:avLst/>
-          </a:prstGeom>
-          <a:noFill/>
-        </p:spPr>
-        <p:txBody>
-          <a:bodyPr wrap="square" lIns="0" rIns="0" tIns="0" bIns="0" anchor="t">
-            <a:spAutoFit/>
-          </a:bodyPr>
-          <a:lstStyle/>
-          <a:p>
-            <a:pPr algn="l">
-              <a:lnSpc>
-                <a:spcPct val="105000"/>
-              </a:lnSpc>
-              <a:spcAft>
-                <a:spcPts val="200"/>
-              </a:spcAft>
-            </a:pPr>
-            <a:r>
-              <a:rPr sz="1350" b="0" i="0">
-                <a:solidFill>
-                  <a:srgbClr val="333D4B"/>
-                </a:solidFill>
-                <a:latin typeface="Calibri"/>
-              </a:rPr>
-              <a:t>You tested it with typical input. Nobody tested the empty field, the very long name, the date in the past, the unusual character. Those paths were generated too — they were just never run.</a:t>
-            </a:r>
-          </a:p>
-        </p:txBody>
-      </p:sp>
-      <p:sp>
-        <p:nvSpPr>
-          <p:cNvPr id="12" name="Rounded Rectangle 11"/>
-          <p:cNvSpPr/>
-          <p:nvPr/>
-        </p:nvSpPr>
-        <p:spPr>
-          <a:xfrm>
-            <a:off x="8112556" y="2057400"/>
-            <a:ext cx="3301898" cy="3200400"/>
-          </a:xfrm>
-          <a:prstGeom prst="roundRect">
-            <a:avLst>
-              <a:gd name="adj" fmla="val 10000"/>
-            </a:avLst>
-          </a:prstGeom>
-          <a:solidFill>
-            <a:srgbClr val="F1F5F9"/>
-          </a:solidFill>
-          <a:ln w="15875">
-            <a:solidFill>
-              <a:srgbClr val="D3DDE6"/>
-            </a:solidFill>
-          </a:ln>
-          <a:effectLst/>
-        </p:spPr>
-        <p:style>
-          <a:lnRef idx="1">
-            <a:schemeClr val="accent1"/>
-          </a:lnRef>
-          <a:fillRef idx="3">
-            <a:schemeClr val="accent1"/>
-          </a:fillRef>
-          <a:effectRef idx="2">
-            <a:schemeClr val="accent1"/>
-          </a:effectRef>
-          <a:fontRef idx="minor">
-            <a:schemeClr val="lt1"/>
-          </a:fontRef>
-        </p:style>
-        <p:txBody>
-          <a:bodyPr rtlCol="0" anchor="ctr"/>
-          <a:lstStyle/>
-          <a:p>
-            <a:pPr algn="ctr"/>
-          </a:p>
-        </p:txBody>
-      </p:sp>
-      <p:sp>
-        <p:nvSpPr>
-          <p:cNvPr id="13" name="Rectangle 12"/>
-          <p:cNvSpPr/>
-          <p:nvPr/>
-        </p:nvSpPr>
-        <p:spPr>
-          <a:xfrm>
-            <a:off x="8313724" y="2331720"/>
-            <a:ext cx="640080" cy="38100"/>
-          </a:xfrm>
-          <a:prstGeom prst="rect">
-            <a:avLst/>
-          </a:prstGeom>
-          <a:solidFill>
-            <a:srgbClr val="0F766E"/>
-          </a:solidFill>
-          <a:ln>
-            <a:noFill/>
-          </a:ln>
-          <a:effectLst/>
-        </p:spPr>
-        <p:style>
-          <a:lnRef idx="1">
-            <a:schemeClr val="accent1"/>
-          </a:lnRef>
-          <a:fillRef idx="3">
-            <a:schemeClr val="accent1"/>
-          </a:fillRef>
-          <a:effectRef idx="2">
-            <a:schemeClr val="accent1"/>
-          </a:effectRef>
-          <a:fontRef idx="minor">
-            <a:schemeClr val="lt1"/>
-          </a:fontRef>
-        </p:style>
-        <p:txBody>
-          <a:bodyPr rtlCol="0" anchor="ctr"/>
-          <a:lstStyle/>
-          <a:p>
-            <a:pPr algn="ctr"/>
-          </a:p>
-        </p:txBody>
-      </p:sp>
-      <p:sp>
-        <p:nvSpPr>
-          <p:cNvPr id="14" name="TextBox 13"/>
-          <p:cNvSpPr txBox="1"/>
-          <p:nvPr/>
-        </p:nvSpPr>
-        <p:spPr>
-          <a:xfrm>
-            <a:off x="8313724" y="2560320"/>
-            <a:ext cx="2899562" cy="640080"/>
-          </a:xfrm>
-          <a:prstGeom prst="rect">
-            <a:avLst/>
-          </a:prstGeom>
-          <a:noFill/>
-        </p:spPr>
-        <p:txBody>
-          <a:bodyPr wrap="square" lIns="0" rIns="0" tIns="0" bIns="0" anchor="t">
-            <a:spAutoFit/>
-          </a:bodyPr>
-          <a:lstStyle/>
-          <a:p>
-            <a:pPr algn="l">
-              <a:lnSpc>
-                <a:spcPct val="105000"/>
-              </a:lnSpc>
-              <a:spcAft>
-                <a:spcPts val="200"/>
-              </a:spcAft>
-            </a:pPr>
-            <a:r>
-              <a:rPr sz="1800" b="1" i="0">
-                <a:solidFill>
-                  <a:srgbClr val="1F2937"/>
-                </a:solidFill>
-                <a:latin typeface="Calibri"/>
-              </a:rPr>
-              <a:t>Silently discarded input</a:t>
-            </a:r>
-          </a:p>
-        </p:txBody>
-      </p:sp>
-      <p:sp>
-        <p:nvSpPr>
-          <p:cNvPr id="15" name="TextBox 14"/>
-          <p:cNvSpPr txBox="1"/>
-          <p:nvPr/>
-        </p:nvSpPr>
-        <p:spPr>
-          <a:xfrm>
-            <a:off x="8313724" y="3246120"/>
-            <a:ext cx="2899562" cy="1737360"/>
-          </a:xfrm>
-          <a:prstGeom prst="rect">
-            <a:avLst/>
-          </a:prstGeom>
-          <a:noFill/>
-        </p:spPr>
-        <p:txBody>
-          <a:bodyPr wrap="square" lIns="0" rIns="0" tIns="0" bIns="0" anchor="t">
-            <a:spAutoFit/>
-          </a:bodyPr>
-          <a:lstStyle/>
-          <a:p>
-            <a:pPr algn="l">
-              <a:lnSpc>
-                <a:spcPct val="105000"/>
-              </a:lnSpc>
-              <a:spcAft>
-                <a:spcPts val="200"/>
-              </a:spcAft>
-            </a:pPr>
-            <a:r>
-              <a:rPr sz="1350" b="0" i="0">
-                <a:solidFill>
-                  <a:srgbClr val="333D4B"/>
-                </a:solidFill>
-                <a:latin typeface="Calibri"/>
-              </a:rPr>
-              <a:t>It accepts something, appears to process it, and quietly ignores part of it. The most dangerous failure, because there is no error and no gap in the output.</a:t>
-            </a:r>
-          </a:p>
-        </p:txBody>
-      </p:sp>
-      <p:sp>
-        <p:nvSpPr>
-          <p:cNvPr id="16" name="TextBox 15"/>
-          <p:cNvSpPr txBox="1"/>
-          <p:nvPr/>
-        </p:nvSpPr>
-        <p:spPr>
-          <a:xfrm>
-            <a:off x="777240" y="6355080"/>
-            <a:ext cx="10637215" cy="274320"/>
+            <a:off x="1280160" y="2743200"/>
+            <a:ext cx="10058400" cy="457200"/>
           </a:xfrm>
           <a:prstGeom prst="rect">
             <a:avLst/>
@@ -7127,27 +7506,27 @@
           <a:lstStyle/>
           <a:p>
             <a:r>
-              <a:rPr sz="1000" b="0" i="0">
-                <a:solidFill>
-                  <a:srgbClr val="6B7787"/>
-                </a:solidFill>
-                <a:latin typeface="Calibri"/>
-              </a:rPr>
-              <a:t>Week 6  ·  Prompt Engineering and Large Language Models</a:t>
-            </a:r>
-          </a:p>
-        </p:txBody>
-      </p:sp>
-      <p:sp>
-        <p:nvSpPr>
-          <p:cNvPr id="17" name="TextBox 16"/>
+              <a:rPr sz="1400" b="1" i="0">
+                <a:solidFill>
+                  <a:srgbClr val="0F766E"/>
+                </a:solidFill>
+                <a:latin typeface="Calibri"/>
+              </a:rPr>
+              <a:t>PART 3</a:t>
+            </a:r>
+          </a:p>
+        </p:txBody>
+      </p:sp>
+      <p:sp>
+        <p:nvSpPr>
+          <p:cNvPr id="4" name="TextBox 3"/>
           <p:cNvSpPr txBox="1"/>
           <p:nvPr/>
         </p:nvSpPr>
         <p:spPr>
           <a:xfrm>
-            <a:off x="10500055" y="6355080"/>
-            <a:ext cx="914400" cy="274320"/>
+            <a:off x="1280160" y="3200400"/>
+            <a:ext cx="10058400" cy="1097280"/>
           </a:xfrm>
           <a:prstGeom prst="rect">
             <a:avLst/>
@@ -7160,15 +7539,14 @@
           </a:bodyPr>
           <a:lstStyle/>
           <a:p>
-            <a:pPr algn="r"/>
-            <a:r>
-              <a:rPr sz="1000" b="0" i="0">
-                <a:solidFill>
-                  <a:srgbClr val="6B7787"/>
-                </a:solidFill>
-                <a:latin typeface="Calibri"/>
-              </a:rPr>
-              <a:t>12</a:t>
+            <a:r>
+              <a:rPr sz="3400" b="1" i="0">
+                <a:solidFill>
+                  <a:srgbClr val="1F2937"/>
+                </a:solidFill>
+                <a:latin typeface="Calibri Light"/>
+              </a:rPr>
+              <a:t>Where It Breaks</a:t>
             </a:r>
           </a:p>
         </p:txBody>
@@ -7193,35 +7571,45 @@
       <p:grpSpPr/>
       <p:sp>
         <p:nvSpPr>
-          <p:cNvPr id="2" name="TextBox 1"/>
-          <p:cNvSpPr txBox="1"/>
-          <p:nvPr/>
-        </p:nvSpPr>
-        <p:spPr>
-          <a:xfrm>
-            <a:off x="777240" y="566928"/>
-            <a:ext cx="10637215" cy="822960"/>
+          <p:cNvPr id="2" name="Rectangle 1"/>
+          <p:cNvSpPr/>
+          <p:nvPr/>
+        </p:nvSpPr>
+        <p:spPr>
+          <a:xfrm>
+            <a:off x="0" y="0"/>
+            <a:ext cx="12191695" cy="6858000"/>
           </a:xfrm>
           <a:prstGeom prst="rect">
             <a:avLst/>
           </a:prstGeom>
-          <a:noFill/>
-        </p:spPr>
-        <p:txBody>
-          <a:bodyPr wrap="square" lIns="0" rIns="0" tIns="0" bIns="0">
-            <a:spAutoFit/>
-          </a:bodyPr>
-          <a:lstStyle/>
-          <a:p>
-            <a:r>
-              <a:rPr sz="3000" b="1" i="0">
-                <a:solidFill>
-                  <a:srgbClr val="1F2937"/>
-                </a:solidFill>
-                <a:latin typeface="Calibri Light"/>
-              </a:rPr>
-              <a:t>How to Use One Responsibly</a:t>
-            </a:r>
+          <a:solidFill>
+            <a:srgbClr val="F1F5F9"/>
+          </a:solidFill>
+          <a:ln>
+            <a:noFill/>
+          </a:ln>
+          <a:effectLst/>
+        </p:spPr>
+        <p:style>
+          <a:lnRef idx="1">
+            <a:schemeClr val="accent1"/>
+          </a:lnRef>
+          <a:fillRef idx="3">
+            <a:schemeClr val="accent1"/>
+          </a:fillRef>
+          <a:effectRef idx="2">
+            <a:schemeClr val="accent1"/>
+          </a:effectRef>
+          <a:fontRef idx="minor">
+            <a:schemeClr val="lt1"/>
+          </a:fontRef>
+        </p:style>
+        <p:txBody>
+          <a:bodyPr rtlCol="0" anchor="ctr"/>
+          <a:lstStyle/>
+          <a:p>
+            <a:pPr algn="ctr"/>
           </a:p>
         </p:txBody>
       </p:sp>
@@ -7233,8 +7621,8 @@
         </p:nvSpPr>
         <p:spPr>
           <a:xfrm>
-            <a:off x="777240" y="1417320"/>
-            <a:ext cx="1051560" cy="38100"/>
+            <a:off x="777240" y="2331720"/>
+            <a:ext cx="1051560" cy="50800"/>
           </a:xfrm>
           <a:prstGeom prst="rect">
             <a:avLst/>
@@ -7277,8 +7665,8 @@
         </p:nvSpPr>
         <p:spPr>
           <a:xfrm>
-            <a:off x="777240" y="1783080"/>
-            <a:ext cx="10637215" cy="4343400"/>
+            <a:off x="777240" y="2697480"/>
+            <a:ext cx="10241280" cy="1828800"/>
           </a:xfrm>
           <a:prstGeom prst="rect">
             <a:avLst/>
@@ -7291,155 +7679,14 @@
           </a:bodyPr>
           <a:lstStyle/>
           <a:p>
-            <a:pPr>
-              <a:lnSpc>
-                <a:spcPct val="115000"/>
-              </a:lnSpc>
-              <a:spcAft>
-                <a:spcPts val="1000"/>
-              </a:spcAft>
-            </a:pPr>
-            <a:r>
-              <a:rPr sz="1900" b="1" i="0">
+            <a:r>
+              <a:rPr sz="3200" b="1" i="0">
                 <a:solidFill>
                   <a:srgbClr val="1F2937"/>
                 </a:solidFill>
-                <a:latin typeface="Calibri"/>
-              </a:rPr>
-              <a:t>•  Test the edges before you trust it, not after.</a:t>
-            </a:r>
-          </a:p>
-          <a:p>
-            <a:pPr lvl="1">
-              <a:lnSpc>
-                <a:spcPct val="115000"/>
-              </a:lnSpc>
-              <a:spcAft>
-                <a:spcPts val="500"/>
-              </a:spcAft>
-            </a:pPr>
-            <a:r>
-              <a:rPr sz="1600" b="0" i="0">
-                <a:solidFill>
-                  <a:srgbClr val="333D4B"/>
-                </a:solidFill>
-                <a:latin typeface="Calibri"/>
-              </a:rPr>
-              <a:t>—  Empty input. Very long input. Turkish characters. A date in the past. A number where text is expected.</a:t>
-            </a:r>
-          </a:p>
-          <a:p>
-            <a:pPr>
-              <a:lnSpc>
-                <a:spcPct val="115000"/>
-              </a:lnSpc>
-              <a:spcAft>
-                <a:spcPts val="1000"/>
-              </a:spcAft>
-            </a:pPr>
-            <a:r>
-              <a:rPr sz="1900" b="1" i="0">
-                <a:solidFill>
-                  <a:srgbClr val="1F2937"/>
-                </a:solidFill>
-                <a:latin typeface="Calibri"/>
-              </a:rPr>
-              <a:t>•  Check a case where you already know the answer.</a:t>
-            </a:r>
-          </a:p>
-          <a:p>
-            <a:pPr lvl="1">
-              <a:lnSpc>
-                <a:spcPct val="115000"/>
-              </a:lnSpc>
-              <a:spcAft>
-                <a:spcPts val="500"/>
-              </a:spcAft>
-            </a:pPr>
-            <a:r>
-              <a:rPr sz="1600" b="0" i="0">
-                <a:solidFill>
-                  <a:srgbClr val="333D4B"/>
-                </a:solidFill>
-                <a:latin typeface="Calibri"/>
-              </a:rPr>
-              <a:t>—  Run something you have done by hand. If it disagrees with you, you learn something either way.</a:t>
-            </a:r>
-          </a:p>
-          <a:p>
-            <a:pPr>
-              <a:lnSpc>
-                <a:spcPct val="115000"/>
-              </a:lnSpc>
-              <a:spcAft>
-                <a:spcPts val="1000"/>
-              </a:spcAft>
-            </a:pPr>
-            <a:r>
-              <a:rPr sz="1900" b="1" i="0">
-                <a:solidFill>
-                  <a:srgbClr val="1F2937"/>
-                </a:solidFill>
-                <a:latin typeface="Calibri"/>
-              </a:rPr>
-              <a:t>•  Keep it advisory.</a:t>
-            </a:r>
-          </a:p>
-          <a:p>
-            <a:pPr lvl="1">
-              <a:lnSpc>
-                <a:spcPct val="115000"/>
-              </a:lnSpc>
-              <a:spcAft>
-                <a:spcPts val="500"/>
-              </a:spcAft>
-            </a:pPr>
-            <a:r>
-              <a:rPr sz="1600" b="0" i="0">
-                <a:solidFill>
-                  <a:srgbClr val="333D4B"/>
-                </a:solidFill>
-                <a:latin typeface="Calibri"/>
-              </a:rPr>
-              <a:t>—  It drafts, formats, checks, reminds. A person decides. Never let it be the final step before something reaches a patient or client.</a:t>
-            </a:r>
-          </a:p>
-          <a:p>
-            <a:pPr>
-              <a:lnSpc>
-                <a:spcPct val="115000"/>
-              </a:lnSpc>
-              <a:spcAft>
-                <a:spcPts val="1000"/>
-              </a:spcAft>
-            </a:pPr>
-            <a:r>
-              <a:rPr sz="1900" b="1" i="0">
-                <a:solidFill>
-                  <a:srgbClr val="1F2937"/>
-                </a:solidFill>
-                <a:latin typeface="Calibri"/>
-              </a:rPr>
-              <a:t>•  Do not put real personal data into it.</a:t>
-            </a:r>
-          </a:p>
-          <a:p>
-            <a:pPr lvl="1">
-              <a:lnSpc>
-                <a:spcPct val="115000"/>
-              </a:lnSpc>
-              <a:spcAft>
-                <a:spcPts val="500"/>
-              </a:spcAft>
-            </a:pPr>
-            <a:r>
-              <a:rPr sz="1600" b="0" i="0">
-                <a:solidFill>
-                  <a:srgbClr val="333D4B"/>
-                </a:solidFill>
-                <a:latin typeface="Calibri"/>
-              </a:rPr>
-              <a:t>—  You do not know where the input goes. That is Week 12, and it applies from today.</a:t>
+                <a:latin typeface="Calibri Light"/>
+              </a:rPr>
+              <a:t>You can see whether it looks right. You cannot see whether it is right.</a:t>
             </a:r>
           </a:p>
         </p:txBody>
@@ -7452,8 +7699,8 @@
         </p:nvSpPr>
         <p:spPr>
           <a:xfrm>
-            <a:off x="777240" y="6355080"/>
-            <a:ext cx="10637215" cy="274320"/>
+            <a:off x="777240" y="4434840"/>
+            <a:ext cx="10241280" cy="731520"/>
           </a:xfrm>
           <a:prstGeom prst="rect">
             <a:avLst/>
@@ -7467,6 +7714,40 @@
           <a:lstStyle/>
           <a:p>
             <a:r>
+              <a:rPr sz="1800" b="0" i="0">
+                <a:solidFill>
+                  <a:srgbClr val="333D4B"/>
+                </a:solidFill>
+                <a:latin typeface="Calibri"/>
+              </a:rPr>
+              <a:t>This is the same gap as Week 1 — but now the fluent, confident, wrong thing is software.</a:t>
+            </a:r>
+          </a:p>
+        </p:txBody>
+      </p:sp>
+      <p:sp>
+        <p:nvSpPr>
+          <p:cNvPr id="6" name="TextBox 5"/>
+          <p:cNvSpPr txBox="1"/>
+          <p:nvPr/>
+        </p:nvSpPr>
+        <p:spPr>
+          <a:xfrm>
+            <a:off x="777240" y="6355080"/>
+            <a:ext cx="10637215" cy="274320"/>
+          </a:xfrm>
+          <a:prstGeom prst="rect">
+            <a:avLst/>
+          </a:prstGeom>
+          <a:noFill/>
+        </p:spPr>
+        <p:txBody>
+          <a:bodyPr wrap="square" lIns="0" rIns="0" tIns="0" bIns="0">
+            <a:spAutoFit/>
+          </a:bodyPr>
+          <a:lstStyle/>
+          <a:p>
+            <a:r>
               <a:rPr sz="1000" b="0" i="0">
                 <a:solidFill>
                   <a:srgbClr val="6B7787"/>
@@ -7480,7 +7761,7 @@
       </p:sp>
       <p:sp>
         <p:nvSpPr>
-          <p:cNvPr id="6" name="TextBox 5"/>
+          <p:cNvPr id="7" name="TextBox 6"/>
           <p:cNvSpPr txBox="1"/>
           <p:nvPr/>
         </p:nvSpPr>
@@ -7533,14 +7814,48 @@
       <p:grpSpPr/>
       <p:sp>
         <p:nvSpPr>
-          <p:cNvPr id="2" name="Rectangle 1"/>
+          <p:cNvPr id="2" name="TextBox 1"/>
+          <p:cNvSpPr txBox="1"/>
+          <p:nvPr/>
+        </p:nvSpPr>
+        <p:spPr>
+          <a:xfrm>
+            <a:off x="777240" y="566928"/>
+            <a:ext cx="10637215" cy="822960"/>
+          </a:xfrm>
+          <a:prstGeom prst="rect">
+            <a:avLst/>
+          </a:prstGeom>
+          <a:noFill/>
+        </p:spPr>
+        <p:txBody>
+          <a:bodyPr wrap="square" lIns="0" rIns="0" tIns="0" bIns="0">
+            <a:spAutoFit/>
+          </a:bodyPr>
+          <a:lstStyle/>
+          <a:p>
+            <a:r>
+              <a:rPr sz="3000" b="1" i="0">
+                <a:solidFill>
+                  <a:srgbClr val="1F2937"/>
+                </a:solidFill>
+                <a:latin typeface="Calibri Light"/>
+              </a:rPr>
+              <a:t>Three Ways a Micro-Tool Fails Quietly</a:t>
+            </a:r>
+          </a:p>
+        </p:txBody>
+      </p:sp>
+      <p:sp>
+        <p:nvSpPr>
+          <p:cNvPr id="3" name="Rectangle 2"/>
           <p:cNvSpPr/>
           <p:nvPr/>
         </p:nvSpPr>
         <p:spPr>
           <a:xfrm>
-            <a:off x="0" y="0"/>
-            <a:ext cx="292608" cy="6858000"/>
+            <a:off x="777240" y="1417320"/>
+            <a:ext cx="1051560" cy="38100"/>
           </a:xfrm>
           <a:prstGeom prst="rect">
             <a:avLst/>
@@ -7577,14 +7892,542 @@
       </p:sp>
       <p:sp>
         <p:nvSpPr>
-          <p:cNvPr id="3" name="TextBox 2"/>
+          <p:cNvPr id="4" name="Rounded Rectangle 3"/>
+          <p:cNvSpPr/>
+          <p:nvPr/>
+        </p:nvSpPr>
+        <p:spPr>
+          <a:xfrm>
+            <a:off x="777240" y="2057400"/>
+            <a:ext cx="3301898" cy="3200400"/>
+          </a:xfrm>
+          <a:prstGeom prst="roundRect">
+            <a:avLst>
+              <a:gd name="adj" fmla="val 10000"/>
+            </a:avLst>
+          </a:prstGeom>
+          <a:solidFill>
+            <a:srgbClr val="F1F5F9"/>
+          </a:solidFill>
+          <a:ln w="15875">
+            <a:solidFill>
+              <a:srgbClr val="D3DDE6"/>
+            </a:solidFill>
+          </a:ln>
+          <a:effectLst/>
+        </p:spPr>
+        <p:style>
+          <a:lnRef idx="1">
+            <a:schemeClr val="accent1"/>
+          </a:lnRef>
+          <a:fillRef idx="3">
+            <a:schemeClr val="accent1"/>
+          </a:fillRef>
+          <a:effectRef idx="2">
+            <a:schemeClr val="accent1"/>
+          </a:effectRef>
+          <a:fontRef idx="minor">
+            <a:schemeClr val="lt1"/>
+          </a:fontRef>
+        </p:style>
+        <p:txBody>
+          <a:bodyPr rtlCol="0" anchor="ctr"/>
+          <a:lstStyle/>
+          <a:p>
+            <a:pPr algn="ctr"/>
+          </a:p>
+        </p:txBody>
+      </p:sp>
+      <p:sp>
+        <p:nvSpPr>
+          <p:cNvPr id="5" name="Rectangle 4"/>
+          <p:cNvSpPr/>
+          <p:nvPr/>
+        </p:nvSpPr>
+        <p:spPr>
+          <a:xfrm>
+            <a:off x="978408" y="2331720"/>
+            <a:ext cx="640080" cy="38100"/>
+          </a:xfrm>
+          <a:prstGeom prst="rect">
+            <a:avLst/>
+          </a:prstGeom>
+          <a:solidFill>
+            <a:srgbClr val="0F766E"/>
+          </a:solidFill>
+          <a:ln>
+            <a:noFill/>
+          </a:ln>
+          <a:effectLst/>
+        </p:spPr>
+        <p:style>
+          <a:lnRef idx="1">
+            <a:schemeClr val="accent1"/>
+          </a:lnRef>
+          <a:fillRef idx="3">
+            <a:schemeClr val="accent1"/>
+          </a:fillRef>
+          <a:effectRef idx="2">
+            <a:schemeClr val="accent1"/>
+          </a:effectRef>
+          <a:fontRef idx="minor">
+            <a:schemeClr val="lt1"/>
+          </a:fontRef>
+        </p:style>
+        <p:txBody>
+          <a:bodyPr rtlCol="0" anchor="ctr"/>
+          <a:lstStyle/>
+          <a:p>
+            <a:pPr algn="ctr"/>
+          </a:p>
+        </p:txBody>
+      </p:sp>
+      <p:sp>
+        <p:nvSpPr>
+          <p:cNvPr id="6" name="TextBox 5"/>
           <p:cNvSpPr txBox="1"/>
           <p:nvPr/>
         </p:nvSpPr>
         <p:spPr>
           <a:xfrm>
-            <a:off x="1280160" y="2743200"/>
-            <a:ext cx="10058400" cy="457200"/>
+            <a:off x="978408" y="2560320"/>
+            <a:ext cx="2899562" cy="640080"/>
+          </a:xfrm>
+          <a:prstGeom prst="rect">
+            <a:avLst/>
+          </a:prstGeom>
+          <a:noFill/>
+        </p:spPr>
+        <p:txBody>
+          <a:bodyPr wrap="square" lIns="0" rIns="0" tIns="0" bIns="0" anchor="t">
+            <a:spAutoFit/>
+          </a:bodyPr>
+          <a:lstStyle/>
+          <a:p>
+            <a:pPr algn="l">
+              <a:lnSpc>
+                <a:spcPct val="105000"/>
+              </a:lnSpc>
+              <a:spcAft>
+                <a:spcPts val="200"/>
+              </a:spcAft>
+            </a:pPr>
+            <a:r>
+              <a:rPr sz="1800" b="1" i="0">
+                <a:solidFill>
+                  <a:srgbClr val="1F2937"/>
+                </a:solidFill>
+                <a:latin typeface="Calibri"/>
+              </a:rPr>
+              <a:t>Wrong logic, right appearance</a:t>
+            </a:r>
+          </a:p>
+        </p:txBody>
+      </p:sp>
+      <p:sp>
+        <p:nvSpPr>
+          <p:cNvPr id="7" name="TextBox 6"/>
+          <p:cNvSpPr txBox="1"/>
+          <p:nvPr/>
+        </p:nvSpPr>
+        <p:spPr>
+          <a:xfrm>
+            <a:off x="978408" y="3246120"/>
+            <a:ext cx="2899562" cy="1737360"/>
+          </a:xfrm>
+          <a:prstGeom prst="rect">
+            <a:avLst/>
+          </a:prstGeom>
+          <a:noFill/>
+        </p:spPr>
+        <p:txBody>
+          <a:bodyPr wrap="square" lIns="0" rIns="0" tIns="0" bIns="0" anchor="t">
+            <a:spAutoFit/>
+          </a:bodyPr>
+          <a:lstStyle/>
+          <a:p>
+            <a:pPr algn="l">
+              <a:lnSpc>
+                <a:spcPct val="105000"/>
+              </a:lnSpc>
+              <a:spcAft>
+                <a:spcPts val="200"/>
+              </a:spcAft>
+            </a:pPr>
+            <a:r>
+              <a:rPr sz="1350" b="0" i="0">
+                <a:solidFill>
+                  <a:srgbClr val="333D4B"/>
+                </a:solidFill>
+                <a:latin typeface="Calibri"/>
+              </a:rPr>
+              <a:t>A calculation that is subtly wrong — a rounding rule, an off-by-one in a date, the wrong threshold. The interface looks perfect. The number is wrong every single time, consistently, which makes it look reliable.</a:t>
+            </a:r>
+          </a:p>
+        </p:txBody>
+      </p:sp>
+      <p:sp>
+        <p:nvSpPr>
+          <p:cNvPr id="8" name="Rounded Rectangle 7"/>
+          <p:cNvSpPr/>
+          <p:nvPr/>
+        </p:nvSpPr>
+        <p:spPr>
+          <a:xfrm>
+            <a:off x="4444898" y="2057400"/>
+            <a:ext cx="3301898" cy="3200400"/>
+          </a:xfrm>
+          <a:prstGeom prst="roundRect">
+            <a:avLst>
+              <a:gd name="adj" fmla="val 10000"/>
+            </a:avLst>
+          </a:prstGeom>
+          <a:solidFill>
+            <a:srgbClr val="F1F5F9"/>
+          </a:solidFill>
+          <a:ln w="15875">
+            <a:solidFill>
+              <a:srgbClr val="D3DDE6"/>
+            </a:solidFill>
+          </a:ln>
+          <a:effectLst/>
+        </p:spPr>
+        <p:style>
+          <a:lnRef idx="1">
+            <a:schemeClr val="accent1"/>
+          </a:lnRef>
+          <a:fillRef idx="3">
+            <a:schemeClr val="accent1"/>
+          </a:fillRef>
+          <a:effectRef idx="2">
+            <a:schemeClr val="accent1"/>
+          </a:effectRef>
+          <a:fontRef idx="minor">
+            <a:schemeClr val="lt1"/>
+          </a:fontRef>
+        </p:style>
+        <p:txBody>
+          <a:bodyPr rtlCol="0" anchor="ctr"/>
+          <a:lstStyle/>
+          <a:p>
+            <a:pPr algn="ctr"/>
+          </a:p>
+        </p:txBody>
+      </p:sp>
+      <p:sp>
+        <p:nvSpPr>
+          <p:cNvPr id="9" name="Rectangle 8"/>
+          <p:cNvSpPr/>
+          <p:nvPr/>
+        </p:nvSpPr>
+        <p:spPr>
+          <a:xfrm>
+            <a:off x="4646066" y="2331720"/>
+            <a:ext cx="640080" cy="38100"/>
+          </a:xfrm>
+          <a:prstGeom prst="rect">
+            <a:avLst/>
+          </a:prstGeom>
+          <a:solidFill>
+            <a:srgbClr val="0F766E"/>
+          </a:solidFill>
+          <a:ln>
+            <a:noFill/>
+          </a:ln>
+          <a:effectLst/>
+        </p:spPr>
+        <p:style>
+          <a:lnRef idx="1">
+            <a:schemeClr val="accent1"/>
+          </a:lnRef>
+          <a:fillRef idx="3">
+            <a:schemeClr val="accent1"/>
+          </a:fillRef>
+          <a:effectRef idx="2">
+            <a:schemeClr val="accent1"/>
+          </a:effectRef>
+          <a:fontRef idx="minor">
+            <a:schemeClr val="lt1"/>
+          </a:fontRef>
+        </p:style>
+        <p:txBody>
+          <a:bodyPr rtlCol="0" anchor="ctr"/>
+          <a:lstStyle/>
+          <a:p>
+            <a:pPr algn="ctr"/>
+          </a:p>
+        </p:txBody>
+      </p:sp>
+      <p:sp>
+        <p:nvSpPr>
+          <p:cNvPr id="10" name="TextBox 9"/>
+          <p:cNvSpPr txBox="1"/>
+          <p:nvPr/>
+        </p:nvSpPr>
+        <p:spPr>
+          <a:xfrm>
+            <a:off x="4646066" y="2560320"/>
+            <a:ext cx="2899562" cy="640080"/>
+          </a:xfrm>
+          <a:prstGeom prst="rect">
+            <a:avLst/>
+          </a:prstGeom>
+          <a:noFill/>
+        </p:spPr>
+        <p:txBody>
+          <a:bodyPr wrap="square" lIns="0" rIns="0" tIns="0" bIns="0" anchor="t">
+            <a:spAutoFit/>
+          </a:bodyPr>
+          <a:lstStyle/>
+          <a:p>
+            <a:pPr algn="l">
+              <a:lnSpc>
+                <a:spcPct val="105000"/>
+              </a:lnSpc>
+              <a:spcAft>
+                <a:spcPts val="200"/>
+              </a:spcAft>
+            </a:pPr>
+            <a:r>
+              <a:rPr sz="1800" b="1" i="0">
+                <a:solidFill>
+                  <a:srgbClr val="1F2937"/>
+                </a:solidFill>
+                <a:latin typeface="Calibri"/>
+              </a:rPr>
+              <a:t>Correct for the cases you tried</a:t>
+            </a:r>
+          </a:p>
+        </p:txBody>
+      </p:sp>
+      <p:sp>
+        <p:nvSpPr>
+          <p:cNvPr id="11" name="TextBox 10"/>
+          <p:cNvSpPr txBox="1"/>
+          <p:nvPr/>
+        </p:nvSpPr>
+        <p:spPr>
+          <a:xfrm>
+            <a:off x="4646066" y="3246120"/>
+            <a:ext cx="2899562" cy="1737360"/>
+          </a:xfrm>
+          <a:prstGeom prst="rect">
+            <a:avLst/>
+          </a:prstGeom>
+          <a:noFill/>
+        </p:spPr>
+        <p:txBody>
+          <a:bodyPr wrap="square" lIns="0" rIns="0" tIns="0" bIns="0" anchor="t">
+            <a:spAutoFit/>
+          </a:bodyPr>
+          <a:lstStyle/>
+          <a:p>
+            <a:pPr algn="l">
+              <a:lnSpc>
+                <a:spcPct val="105000"/>
+              </a:lnSpc>
+              <a:spcAft>
+                <a:spcPts val="200"/>
+              </a:spcAft>
+            </a:pPr>
+            <a:r>
+              <a:rPr sz="1350" b="0" i="0">
+                <a:solidFill>
+                  <a:srgbClr val="333D4B"/>
+                </a:solidFill>
+                <a:latin typeface="Calibri"/>
+              </a:rPr>
+              <a:t>You tested it with typical input. Nobody tested the empty field, the very long name, the date in the past, the unusual character. Those paths were generated too — they were just never run.</a:t>
+            </a:r>
+          </a:p>
+        </p:txBody>
+      </p:sp>
+      <p:sp>
+        <p:nvSpPr>
+          <p:cNvPr id="12" name="Rounded Rectangle 11"/>
+          <p:cNvSpPr/>
+          <p:nvPr/>
+        </p:nvSpPr>
+        <p:spPr>
+          <a:xfrm>
+            <a:off x="8112556" y="2057400"/>
+            <a:ext cx="3301898" cy="3200400"/>
+          </a:xfrm>
+          <a:prstGeom prst="roundRect">
+            <a:avLst>
+              <a:gd name="adj" fmla="val 10000"/>
+            </a:avLst>
+          </a:prstGeom>
+          <a:solidFill>
+            <a:srgbClr val="F1F5F9"/>
+          </a:solidFill>
+          <a:ln w="15875">
+            <a:solidFill>
+              <a:srgbClr val="D3DDE6"/>
+            </a:solidFill>
+          </a:ln>
+          <a:effectLst/>
+        </p:spPr>
+        <p:style>
+          <a:lnRef idx="1">
+            <a:schemeClr val="accent1"/>
+          </a:lnRef>
+          <a:fillRef idx="3">
+            <a:schemeClr val="accent1"/>
+          </a:fillRef>
+          <a:effectRef idx="2">
+            <a:schemeClr val="accent1"/>
+          </a:effectRef>
+          <a:fontRef idx="minor">
+            <a:schemeClr val="lt1"/>
+          </a:fontRef>
+        </p:style>
+        <p:txBody>
+          <a:bodyPr rtlCol="0" anchor="ctr"/>
+          <a:lstStyle/>
+          <a:p>
+            <a:pPr algn="ctr"/>
+          </a:p>
+        </p:txBody>
+      </p:sp>
+      <p:sp>
+        <p:nvSpPr>
+          <p:cNvPr id="13" name="Rectangle 12"/>
+          <p:cNvSpPr/>
+          <p:nvPr/>
+        </p:nvSpPr>
+        <p:spPr>
+          <a:xfrm>
+            <a:off x="8313724" y="2331720"/>
+            <a:ext cx="640080" cy="38100"/>
+          </a:xfrm>
+          <a:prstGeom prst="rect">
+            <a:avLst/>
+          </a:prstGeom>
+          <a:solidFill>
+            <a:srgbClr val="0F766E"/>
+          </a:solidFill>
+          <a:ln>
+            <a:noFill/>
+          </a:ln>
+          <a:effectLst/>
+        </p:spPr>
+        <p:style>
+          <a:lnRef idx="1">
+            <a:schemeClr val="accent1"/>
+          </a:lnRef>
+          <a:fillRef idx="3">
+            <a:schemeClr val="accent1"/>
+          </a:fillRef>
+          <a:effectRef idx="2">
+            <a:schemeClr val="accent1"/>
+          </a:effectRef>
+          <a:fontRef idx="minor">
+            <a:schemeClr val="lt1"/>
+          </a:fontRef>
+        </p:style>
+        <p:txBody>
+          <a:bodyPr rtlCol="0" anchor="ctr"/>
+          <a:lstStyle/>
+          <a:p>
+            <a:pPr algn="ctr"/>
+          </a:p>
+        </p:txBody>
+      </p:sp>
+      <p:sp>
+        <p:nvSpPr>
+          <p:cNvPr id="14" name="TextBox 13"/>
+          <p:cNvSpPr txBox="1"/>
+          <p:nvPr/>
+        </p:nvSpPr>
+        <p:spPr>
+          <a:xfrm>
+            <a:off x="8313724" y="2560320"/>
+            <a:ext cx="2899562" cy="640080"/>
+          </a:xfrm>
+          <a:prstGeom prst="rect">
+            <a:avLst/>
+          </a:prstGeom>
+          <a:noFill/>
+        </p:spPr>
+        <p:txBody>
+          <a:bodyPr wrap="square" lIns="0" rIns="0" tIns="0" bIns="0" anchor="t">
+            <a:spAutoFit/>
+          </a:bodyPr>
+          <a:lstStyle/>
+          <a:p>
+            <a:pPr algn="l">
+              <a:lnSpc>
+                <a:spcPct val="105000"/>
+              </a:lnSpc>
+              <a:spcAft>
+                <a:spcPts val="200"/>
+              </a:spcAft>
+            </a:pPr>
+            <a:r>
+              <a:rPr sz="1800" b="1" i="0">
+                <a:solidFill>
+                  <a:srgbClr val="1F2937"/>
+                </a:solidFill>
+                <a:latin typeface="Calibri"/>
+              </a:rPr>
+              <a:t>Silently discarded input</a:t>
+            </a:r>
+          </a:p>
+        </p:txBody>
+      </p:sp>
+      <p:sp>
+        <p:nvSpPr>
+          <p:cNvPr id="15" name="TextBox 14"/>
+          <p:cNvSpPr txBox="1"/>
+          <p:nvPr/>
+        </p:nvSpPr>
+        <p:spPr>
+          <a:xfrm>
+            <a:off x="8313724" y="3246120"/>
+            <a:ext cx="2899562" cy="1737360"/>
+          </a:xfrm>
+          <a:prstGeom prst="rect">
+            <a:avLst/>
+          </a:prstGeom>
+          <a:noFill/>
+        </p:spPr>
+        <p:txBody>
+          <a:bodyPr wrap="square" lIns="0" rIns="0" tIns="0" bIns="0" anchor="t">
+            <a:spAutoFit/>
+          </a:bodyPr>
+          <a:lstStyle/>
+          <a:p>
+            <a:pPr algn="l">
+              <a:lnSpc>
+                <a:spcPct val="105000"/>
+              </a:lnSpc>
+              <a:spcAft>
+                <a:spcPts val="200"/>
+              </a:spcAft>
+            </a:pPr>
+            <a:r>
+              <a:rPr sz="1350" b="0" i="0">
+                <a:solidFill>
+                  <a:srgbClr val="333D4B"/>
+                </a:solidFill>
+                <a:latin typeface="Calibri"/>
+              </a:rPr>
+              <a:t>It accepts something, appears to process it, and quietly ignores part of it. The most dangerous failure, because there is no error and no gap in the output.</a:t>
+            </a:r>
+          </a:p>
+        </p:txBody>
+      </p:sp>
+      <p:sp>
+        <p:nvSpPr>
+          <p:cNvPr id="16" name="TextBox 15"/>
+          <p:cNvSpPr txBox="1"/>
+          <p:nvPr/>
+        </p:nvSpPr>
+        <p:spPr>
+          <a:xfrm>
+            <a:off x="777240" y="6355080"/>
+            <a:ext cx="10637215" cy="274320"/>
           </a:xfrm>
           <a:prstGeom prst="rect">
             <a:avLst/>
@@ -7598,27 +8441,27 @@
           <a:lstStyle/>
           <a:p>
             <a:r>
-              <a:rPr sz="1400" b="1" i="0">
-                <a:solidFill>
-                  <a:srgbClr val="0F766E"/>
-                </a:solidFill>
-                <a:latin typeface="Calibri"/>
-              </a:rPr>
-              <a:t>PART 4</a:t>
-            </a:r>
-          </a:p>
-        </p:txBody>
-      </p:sp>
-      <p:sp>
-        <p:nvSpPr>
-          <p:cNvPr id="4" name="TextBox 3"/>
+              <a:rPr sz="1000" b="0" i="0">
+                <a:solidFill>
+                  <a:srgbClr val="6B7787"/>
+                </a:solidFill>
+                <a:latin typeface="Calibri"/>
+              </a:rPr>
+              <a:t>Week 6  ·  Prompt Engineering and Large Language Models</a:t>
+            </a:r>
+          </a:p>
+        </p:txBody>
+      </p:sp>
+      <p:sp>
+        <p:nvSpPr>
+          <p:cNvPr id="17" name="TextBox 16"/>
           <p:cNvSpPr txBox="1"/>
           <p:nvPr/>
         </p:nvSpPr>
         <p:spPr>
           <a:xfrm>
-            <a:off x="1280160" y="3200400"/>
-            <a:ext cx="10058400" cy="1097280"/>
+            <a:off x="10500055" y="6355080"/>
+            <a:ext cx="914400" cy="274320"/>
           </a:xfrm>
           <a:prstGeom prst="rect">
             <a:avLst/>
@@ -7631,14 +8474,15 @@
           </a:bodyPr>
           <a:lstStyle/>
           <a:p>
-            <a:r>
-              <a:rPr sz="3400" b="1" i="0">
-                <a:solidFill>
-                  <a:srgbClr val="1F2937"/>
-                </a:solidFill>
-                <a:latin typeface="Calibri Light"/>
-              </a:rPr>
-              <a:t>Build</a:t>
+            <a:pPr algn="r"/>
+            <a:r>
+              <a:rPr sz="1000" b="0" i="0">
+                <a:solidFill>
+                  <a:srgbClr val="6B7787"/>
+                </a:solidFill>
+                <a:latin typeface="Calibri"/>
+              </a:rPr>
+              <a:t>14</a:t>
             </a:r>
           </a:p>
         </p:txBody>
@@ -7670,7 +8514,7 @@
         <p:spPr>
           <a:xfrm>
             <a:off x="777240" y="566928"/>
-            <a:ext cx="10637215" cy="365760"/>
+            <a:ext cx="10637215" cy="822960"/>
           </a:xfrm>
           <a:prstGeom prst="rect">
             <a:avLst/>
@@ -7684,67 +8528,33 @@
           <a:lstStyle/>
           <a:p>
             <a:r>
-              <a:rPr sz="1300" b="1" i="0">
-                <a:solidFill>
-                  <a:srgbClr val="B45309"/>
-                </a:solidFill>
-                <a:latin typeface="Calibri"/>
-              </a:rPr>
-              <a:t>IN-CLASS ACTIVITY  ·  20 MINUTES</a:t>
-            </a:r>
-          </a:p>
-        </p:txBody>
-      </p:sp>
-      <p:sp>
-        <p:nvSpPr>
-          <p:cNvPr id="3" name="TextBox 2"/>
-          <p:cNvSpPr txBox="1"/>
-          <p:nvPr/>
-        </p:nvSpPr>
-        <p:spPr>
-          <a:xfrm>
-            <a:off x="777240" y="960120"/>
-            <a:ext cx="10637215" cy="731520"/>
+              <a:rPr sz="3000" b="1" i="0">
+                <a:solidFill>
+                  <a:srgbClr val="1F2937"/>
+                </a:solidFill>
+                <a:latin typeface="Calibri Light"/>
+              </a:rPr>
+              <a:t>How to Use One Responsibly</a:t>
+            </a:r>
+          </a:p>
+        </p:txBody>
+      </p:sp>
+      <p:sp>
+        <p:nvSpPr>
+          <p:cNvPr id="3" name="Rectangle 2"/>
+          <p:cNvSpPr/>
+          <p:nvPr/>
+        </p:nvSpPr>
+        <p:spPr>
+          <a:xfrm>
+            <a:off x="777240" y="1417320"/>
+            <a:ext cx="1051560" cy="38100"/>
           </a:xfrm>
           <a:prstGeom prst="rect">
             <a:avLst/>
           </a:prstGeom>
-          <a:noFill/>
-        </p:spPr>
-        <p:txBody>
-          <a:bodyPr wrap="square" lIns="0" rIns="0" tIns="0" bIns="0">
-            <a:spAutoFit/>
-          </a:bodyPr>
-          <a:lstStyle/>
-          <a:p>
-            <a:r>
-              <a:rPr sz="3000" b="1" i="0">
-                <a:solidFill>
-                  <a:srgbClr val="1F2937"/>
-                </a:solidFill>
-                <a:latin typeface="Calibri Light"/>
-              </a:rPr>
-              <a:t>Build Your Micro-Tool</a:t>
-            </a:r>
-          </a:p>
-        </p:txBody>
-      </p:sp>
-      <p:sp>
-        <p:nvSpPr>
-          <p:cNvPr id="4" name="Rectangle 3"/>
-          <p:cNvSpPr/>
-          <p:nvPr/>
-        </p:nvSpPr>
-        <p:spPr>
-          <a:xfrm>
-            <a:off x="777240" y="1783080"/>
-            <a:ext cx="1051560" cy="38100"/>
-          </a:xfrm>
-          <a:prstGeom prst="rect">
-            <a:avLst/>
-          </a:prstGeom>
           <a:solidFill>
-            <a:srgbClr val="B45309"/>
+            <a:srgbClr val="0F766E"/>
           </a:solidFill>
           <a:ln>
             <a:noFill/>
@@ -7775,14 +8585,14 @@
       </p:sp>
       <p:sp>
         <p:nvSpPr>
-          <p:cNvPr id="5" name="TextBox 4"/>
+          <p:cNvPr id="4" name="TextBox 3"/>
           <p:cNvSpPr txBox="1"/>
           <p:nvPr/>
         </p:nvSpPr>
         <p:spPr>
           <a:xfrm>
-            <a:off x="777240" y="2148840"/>
-            <a:ext cx="10637215" cy="3931920"/>
+            <a:off x="777240" y="1783080"/>
+            <a:ext cx="10637215" cy="4343400"/>
           </a:xfrm>
           <a:prstGeom prst="rect">
             <a:avLst/>
@@ -7810,7 +8620,7 @@
                 </a:solidFill>
                 <a:latin typeface="Calibri"/>
               </a:rPr>
-              <a:t>•  1.  Pick one annoying, repetitive job from your own field.</a:t>
+              <a:t>•  Test the edges before you trust it, not after.</a:t>
             </a:r>
           </a:p>
           <a:p>
@@ -7829,7 +8639,7 @@
                 </a:solidFill>
                 <a:latin typeface="Calibri"/>
               </a:rPr>
-              <a:t>—  Small. Something you or someone you know does by hand, often.</a:t>
+              <a:t>—  Empty input. Very long input. Turkish characters. A date in the past. A number where text is expected.</a:t>
             </a:r>
           </a:p>
           <a:p>
@@ -7848,7 +8658,7 @@
                 </a:solidFill>
                 <a:latin typeface="Calibri"/>
               </a:rPr>
-              <a:t>•  2.  Write the description using Week 4's four levers.</a:t>
+              <a:t>•  Check a case where you already know the answer.</a:t>
             </a:r>
           </a:p>
           <a:p>
@@ -7867,7 +8677,7 @@
                 </a:solidFill>
                 <a:latin typeface="Calibri"/>
               </a:rPr>
-              <a:t>—  Context: who uses it. Task: what it does. Format: what the output looks like. Example: a sample output if useful.</a:t>
+              <a:t>—  Run something you have done by hand. If it disagrees with you, you learn something either way.</a:t>
             </a:r>
           </a:p>
           <a:p>
@@ -7886,7 +8696,7 @@
                 </a:solidFill>
                 <a:latin typeface="Calibri"/>
               </a:rPr>
-              <a:t>•  3.  Generate it. Then immediately try to break it.</a:t>
+              <a:t>•  Keep it advisory.</a:t>
             </a:r>
           </a:p>
           <a:p>
@@ -7905,7 +8715,7 @@
                 </a:solidFill>
                 <a:latin typeface="Calibri"/>
               </a:rPr>
-              <a:t>—  Empty input. Turkish characters. Something absurd. Note what happens.</a:t>
+              <a:t>—  It drafts, formats, checks, reminds. A person decides. Never let it be the final step before something reaches a patient or client.</a:t>
             </a:r>
           </a:p>
           <a:p>
@@ -7924,14 +8734,33 @@
                 </a:solidFill>
                 <a:latin typeface="Calibri"/>
               </a:rPr>
-              <a:t>•  4.  Write one sentence: what would you have to check before letting anyone else use this?</a:t>
-            </a:r>
-          </a:p>
-        </p:txBody>
-      </p:sp>
-      <p:sp>
-        <p:nvSpPr>
-          <p:cNvPr id="6" name="TextBox 5"/>
+              <a:t>•  Do not put real personal data into it.</a:t>
+            </a:r>
+          </a:p>
+          <a:p>
+            <a:pPr lvl="1">
+              <a:lnSpc>
+                <a:spcPct val="115000"/>
+              </a:lnSpc>
+              <a:spcAft>
+                <a:spcPts val="500"/>
+              </a:spcAft>
+            </a:pPr>
+            <a:r>
+              <a:rPr sz="1600" b="0" i="0">
+                <a:solidFill>
+                  <a:srgbClr val="333D4B"/>
+                </a:solidFill>
+                <a:latin typeface="Calibri"/>
+              </a:rPr>
+              <a:t>—  You do not know where the input goes. That is Week 12, and it applies from today.</a:t>
+            </a:r>
+          </a:p>
+        </p:txBody>
+      </p:sp>
+      <p:sp>
+        <p:nvSpPr>
+          <p:cNvPr id="5" name="TextBox 4"/>
           <p:cNvSpPr txBox="1"/>
           <p:nvPr/>
         </p:nvSpPr>
@@ -7965,7 +8794,7 @@
       </p:sp>
       <p:sp>
         <p:nvSpPr>
-          <p:cNvPr id="7" name="TextBox 6"/>
+          <p:cNvPr id="6" name="TextBox 5"/>
           <p:cNvSpPr txBox="1"/>
           <p:nvPr/>
         </p:nvSpPr>
@@ -8018,48 +8847,14 @@
       <p:grpSpPr/>
       <p:sp>
         <p:nvSpPr>
-          <p:cNvPr id="2" name="TextBox 1"/>
-          <p:cNvSpPr txBox="1"/>
-          <p:nvPr/>
-        </p:nvSpPr>
-        <p:spPr>
-          <a:xfrm>
-            <a:off x="777240" y="566928"/>
-            <a:ext cx="10637215" cy="822960"/>
-          </a:xfrm>
-          <a:prstGeom prst="rect">
-            <a:avLst/>
-          </a:prstGeom>
-          <a:noFill/>
-        </p:spPr>
-        <p:txBody>
-          <a:bodyPr wrap="square" lIns="0" rIns="0" tIns="0" bIns="0">
-            <a:spAutoFit/>
-          </a:bodyPr>
-          <a:lstStyle/>
-          <a:p>
-            <a:r>
-              <a:rPr sz="3000" b="1" i="0">
-                <a:solidFill>
-                  <a:srgbClr val="1F2937"/>
-                </a:solidFill>
-                <a:latin typeface="Calibri Light"/>
-              </a:rPr>
-              <a:t>What You Probably Found</a:t>
-            </a:r>
-          </a:p>
-        </p:txBody>
-      </p:sp>
-      <p:sp>
-        <p:nvSpPr>
-          <p:cNvPr id="3" name="Rectangle 2"/>
+          <p:cNvPr id="2" name="Rectangle 1"/>
           <p:cNvSpPr/>
           <p:nvPr/>
         </p:nvSpPr>
         <p:spPr>
           <a:xfrm>
-            <a:off x="777240" y="1417320"/>
-            <a:ext cx="1051560" cy="38100"/>
+            <a:off x="0" y="0"/>
+            <a:ext cx="292608" cy="6858000"/>
           </a:xfrm>
           <a:prstGeom prst="rect">
             <a:avLst/>
@@ -8096,14 +8891,14 @@
       </p:sp>
       <p:sp>
         <p:nvSpPr>
-          <p:cNvPr id="4" name="TextBox 3"/>
+          <p:cNvPr id="3" name="TextBox 2"/>
           <p:cNvSpPr txBox="1"/>
           <p:nvPr/>
         </p:nvSpPr>
         <p:spPr>
           <a:xfrm>
-            <a:off x="777240" y="1783080"/>
-            <a:ext cx="10637215" cy="4343400"/>
+            <a:off x="1280160" y="2743200"/>
+            <a:ext cx="10058400" cy="457200"/>
           </a:xfrm>
           <a:prstGeom prst="rect">
             <a:avLst/>
@@ -8116,141 +8911,28 @@
           </a:bodyPr>
           <a:lstStyle/>
           <a:p>
-            <a:pPr lvl="1">
-              <a:lnSpc>
-                <a:spcPct val="115000"/>
-              </a:lnSpc>
-              <a:spcAft>
-                <a:spcPts val="500"/>
-              </a:spcAft>
-            </a:pPr>
-            <a:r>
-              <a:rPr sz="1600" b="0" i="0">
-                <a:solidFill>
-                  <a:srgbClr val="333D4B"/>
-                </a:solidFill>
-                <a:latin typeface="Calibri"/>
-              </a:rPr>
-              <a:t>—  It worked, and faster than expected. That is the normal outcome — it is not luck.</a:t>
-            </a:r>
-          </a:p>
-          <a:p>
-            <a:pPr lvl="1">
-              <a:lnSpc>
-                <a:spcPct val="115000"/>
-              </a:lnSpc>
-              <a:spcAft>
-                <a:spcPts val="500"/>
-              </a:spcAft>
-            </a:pPr>
-            <a:r>
-              <a:rPr sz="1600" b="0" i="0">
-                <a:solidFill>
-                  <a:srgbClr val="333D4B"/>
-                </a:solidFill>
-                <a:latin typeface="Calibri"/>
-              </a:rPr>
-              <a:t>—  It broke on empty input, or handled it in a way nobody would have chosen deliberately</a:t>
-            </a:r>
-          </a:p>
-          <a:p>
-            <a:pPr lvl="1">
-              <a:lnSpc>
-                <a:spcPct val="115000"/>
-              </a:lnSpc>
-              <a:spcAft>
-                <a:spcPts val="500"/>
-              </a:spcAft>
-            </a:pPr>
-            <a:r>
-              <a:rPr sz="1600" b="0" i="0">
-                <a:solidFill>
-                  <a:srgbClr val="333D4B"/>
-                </a:solidFill>
-                <a:latin typeface="Calibri"/>
-              </a:rPr>
-              <a:t>—  Turkish characters caused a problem somewhere — very common</a:t>
-            </a:r>
-          </a:p>
-          <a:p>
-            <a:pPr lvl="1">
-              <a:lnSpc>
-                <a:spcPct val="115000"/>
-              </a:lnSpc>
-              <a:spcAft>
-                <a:spcPts val="500"/>
-              </a:spcAft>
-            </a:pPr>
-            <a:r>
-              <a:rPr sz="1600" b="0" i="0">
-                <a:solidFill>
-                  <a:srgbClr val="333D4B"/>
-                </a:solidFill>
-                <a:latin typeface="Calibri"/>
-              </a:rPr>
-              <a:t>—  Asking for a change worked, but occasionally broke something that had been working</a:t>
-            </a:r>
-          </a:p>
-          <a:p>
-            <a:pPr>
-              <a:lnSpc>
-                <a:spcPct val="115000"/>
-              </a:lnSpc>
-              <a:spcAft>
-                <a:spcPts val="1000"/>
-              </a:spcAft>
-            </a:pPr>
-          </a:p>
-          <a:p>
-            <a:pPr>
-              <a:lnSpc>
-                <a:spcPct val="115000"/>
-              </a:lnSpc>
-              <a:spcAft>
-                <a:spcPts val="1000"/>
-              </a:spcAft>
-            </a:pPr>
-            <a:r>
-              <a:rPr sz="1900" b="1" i="0">
-                <a:solidFill>
-                  <a:srgbClr val="1F2937"/>
-                </a:solidFill>
-                <a:latin typeface="Calibri"/>
-              </a:rPr>
-              <a:t>•  That last one is worth naming: you cannot see what a change affected.</a:t>
-            </a:r>
-          </a:p>
-          <a:p>
-            <a:pPr lvl="1">
-              <a:lnSpc>
-                <a:spcPct val="115000"/>
-              </a:lnSpc>
-              <a:spcAft>
-                <a:spcPts val="500"/>
-              </a:spcAft>
-            </a:pPr>
-            <a:r>
-              <a:rPr sz="1600" b="0" i="0">
-                <a:solidFill>
-                  <a:srgbClr val="333D4B"/>
-                </a:solidFill>
-                <a:latin typeface="Calibri"/>
-              </a:rPr>
-              <a:t>—  When you ask for a modification, re-test the things that already worked. Every time.</a:t>
-            </a:r>
-          </a:p>
-        </p:txBody>
-      </p:sp>
-      <p:sp>
-        <p:nvSpPr>
-          <p:cNvPr id="5" name="TextBox 4"/>
+            <a:r>
+              <a:rPr sz="1400" b="1" i="0">
+                <a:solidFill>
+                  <a:srgbClr val="0F766E"/>
+                </a:solidFill>
+                <a:latin typeface="Calibri"/>
+              </a:rPr>
+              <a:t>PART 4</a:t>
+            </a:r>
+          </a:p>
+        </p:txBody>
+      </p:sp>
+      <p:sp>
+        <p:nvSpPr>
+          <p:cNvPr id="4" name="TextBox 3"/>
           <p:cNvSpPr txBox="1"/>
           <p:nvPr/>
         </p:nvSpPr>
         <p:spPr>
           <a:xfrm>
-            <a:off x="777240" y="6355080"/>
-            <a:ext cx="10637215" cy="274320"/>
+            <a:off x="1280160" y="3200400"/>
+            <a:ext cx="10058400" cy="1097280"/>
           </a:xfrm>
           <a:prstGeom prst="rect">
             <a:avLst/>
@@ -8264,48 +8946,13 @@
           <a:lstStyle/>
           <a:p>
             <a:r>
-              <a:rPr sz="1000" b="0" i="0">
-                <a:solidFill>
-                  <a:srgbClr val="6B7787"/>
-                </a:solidFill>
-                <a:latin typeface="Calibri"/>
-              </a:rPr>
-              <a:t>Week 6  ·  Prompt Engineering and Large Language Models</a:t>
-            </a:r>
-          </a:p>
-        </p:txBody>
-      </p:sp>
-      <p:sp>
-        <p:nvSpPr>
-          <p:cNvPr id="6" name="TextBox 5"/>
-          <p:cNvSpPr txBox="1"/>
-          <p:nvPr/>
-        </p:nvSpPr>
-        <p:spPr>
-          <a:xfrm>
-            <a:off x="10500055" y="6355080"/>
-            <a:ext cx="914400" cy="274320"/>
-          </a:xfrm>
-          <a:prstGeom prst="rect">
-            <a:avLst/>
-          </a:prstGeom>
-          <a:noFill/>
-        </p:spPr>
-        <p:txBody>
-          <a:bodyPr wrap="square" lIns="0" rIns="0" tIns="0" bIns="0">
-            <a:spAutoFit/>
-          </a:bodyPr>
-          <a:lstStyle/>
-          <a:p>
-            <a:pPr algn="r"/>
-            <a:r>
-              <a:rPr sz="1000" b="0" i="0">
-                <a:solidFill>
-                  <a:srgbClr val="6B7787"/>
-                </a:solidFill>
-                <a:latin typeface="Calibri"/>
-              </a:rPr>
-              <a:t>16</a:t>
+              <a:rPr sz="3400" b="1" i="0">
+                <a:solidFill>
+                  <a:srgbClr val="1F2937"/>
+                </a:solidFill>
+                <a:latin typeface="Calibri Light"/>
+              </a:rPr>
+              <a:t>Build</a:t>
             </a:r>
           </a:p>
         </p:txBody>
@@ -8337,7 +8984,7 @@
         <p:spPr>
           <a:xfrm>
             <a:off x="777240" y="566928"/>
-            <a:ext cx="10637215" cy="822960"/>
+            <a:ext cx="10637215" cy="365760"/>
           </a:xfrm>
           <a:prstGeom prst="rect">
             <a:avLst/>
@@ -8351,33 +8998,67 @@
           <a:lstStyle/>
           <a:p>
             <a:r>
-              <a:rPr sz="3000" b="1" i="0">
-                <a:solidFill>
-                  <a:srgbClr val="1F2937"/>
-                </a:solidFill>
-                <a:latin typeface="Calibri Light"/>
-              </a:rPr>
-              <a:t>Concepts You Must Be Able to Define and Diagnose</a:t>
-            </a:r>
-          </a:p>
-        </p:txBody>
-      </p:sp>
-      <p:sp>
-        <p:nvSpPr>
-          <p:cNvPr id="3" name="Rectangle 2"/>
-          <p:cNvSpPr/>
-          <p:nvPr/>
-        </p:nvSpPr>
-        <p:spPr>
-          <a:xfrm>
-            <a:off x="777240" y="1417320"/>
-            <a:ext cx="1051560" cy="38100"/>
+              <a:rPr sz="1300" b="1" i="0">
+                <a:solidFill>
+                  <a:srgbClr val="B45309"/>
+                </a:solidFill>
+                <a:latin typeface="Calibri"/>
+              </a:rPr>
+              <a:t>IN-CLASS ACTIVITY  ·  20 MINUTES</a:t>
+            </a:r>
+          </a:p>
+        </p:txBody>
+      </p:sp>
+      <p:sp>
+        <p:nvSpPr>
+          <p:cNvPr id="3" name="TextBox 2"/>
+          <p:cNvSpPr txBox="1"/>
+          <p:nvPr/>
+        </p:nvSpPr>
+        <p:spPr>
+          <a:xfrm>
+            <a:off x="777240" y="960120"/>
+            <a:ext cx="10637215" cy="731520"/>
           </a:xfrm>
           <a:prstGeom prst="rect">
             <a:avLst/>
           </a:prstGeom>
+          <a:noFill/>
+        </p:spPr>
+        <p:txBody>
+          <a:bodyPr wrap="square" lIns="0" rIns="0" tIns="0" bIns="0">
+            <a:spAutoFit/>
+          </a:bodyPr>
+          <a:lstStyle/>
+          <a:p>
+            <a:r>
+              <a:rPr sz="3000" b="1" i="0">
+                <a:solidFill>
+                  <a:srgbClr val="1F2937"/>
+                </a:solidFill>
+                <a:latin typeface="Calibri Light"/>
+              </a:rPr>
+              <a:t>Build Your Micro-Tool</a:t>
+            </a:r>
+          </a:p>
+        </p:txBody>
+      </p:sp>
+      <p:sp>
+        <p:nvSpPr>
+          <p:cNvPr id="4" name="Rectangle 3"/>
+          <p:cNvSpPr/>
+          <p:nvPr/>
+        </p:nvSpPr>
+        <p:spPr>
+          <a:xfrm>
+            <a:off x="777240" y="1783080"/>
+            <a:ext cx="1051560" cy="38100"/>
+          </a:xfrm>
+          <a:prstGeom prst="rect">
+            <a:avLst/>
+          </a:prstGeom>
           <a:solidFill>
-            <a:srgbClr val="0F766E"/>
+            <a:srgbClr val="B45309"/>
           </a:solidFill>
           <a:ln>
             <a:noFill/>
@@ -8408,58 +9089,14 @@
       </p:sp>
       <p:sp>
         <p:nvSpPr>
-          <p:cNvPr id="4" name="Rectangle 3"/>
-          <p:cNvSpPr/>
-          <p:nvPr/>
-        </p:nvSpPr>
-        <p:spPr>
-          <a:xfrm>
-            <a:off x="777240" y="1783080"/>
-            <a:ext cx="10637215" cy="4251960"/>
-          </a:xfrm>
-          <a:prstGeom prst="rect">
-            <a:avLst/>
-          </a:prstGeom>
-          <a:solidFill>
-            <a:srgbClr val="F1F5F9"/>
-          </a:solidFill>
-          <a:ln>
-            <a:noFill/>
-          </a:ln>
-          <a:effectLst/>
-        </p:spPr>
-        <p:style>
-          <a:lnRef idx="1">
-            <a:schemeClr val="accent1"/>
-          </a:lnRef>
-          <a:fillRef idx="3">
-            <a:schemeClr val="accent1"/>
-          </a:fillRef>
-          <a:effectRef idx="2">
-            <a:schemeClr val="accent1"/>
-          </a:effectRef>
-          <a:fontRef idx="minor">
-            <a:schemeClr val="lt1"/>
-          </a:fontRef>
-        </p:style>
-        <p:txBody>
-          <a:bodyPr rtlCol="0" anchor="ctr"/>
-          <a:lstStyle/>
-          <a:p>
-            <a:pPr algn="ctr"/>
-          </a:p>
-        </p:txBody>
-      </p:sp>
-      <p:sp>
-        <p:nvSpPr>
           <p:cNvPr id="5" name="TextBox 4"/>
           <p:cNvSpPr txBox="1"/>
           <p:nvPr/>
         </p:nvSpPr>
         <p:spPr>
           <a:xfrm>
-            <a:off x="1188720" y="2103120"/>
-            <a:ext cx="9814255" cy="3611880"/>
+            <a:off x="777240" y="2148840"/>
+            <a:ext cx="10637215" cy="3931920"/>
           </a:xfrm>
           <a:prstGeom prst="rect">
             <a:avLst/>
@@ -8487,7 +9124,7 @@
                 </a:solidFill>
                 <a:latin typeface="Calibri"/>
               </a:rPr>
-              <a:t>•  Micro-Tool</a:t>
+              <a:t>•  1.  Pick one annoying, repetitive job from your own field.</a:t>
             </a:r>
           </a:p>
           <a:p>
@@ -8506,7 +9143,7 @@
                 </a:solidFill>
                 <a:latin typeface="Calibri"/>
               </a:rPr>
-              <a:t>—  A single-purpose, single-screen tool generated from a description. One job, one screen, no stored data.</a:t>
+              <a:t>—  Small. Something you or someone you know does by hand, often.</a:t>
             </a:r>
           </a:p>
           <a:p>
@@ -8525,7 +9162,7 @@
                 </a:solidFill>
                 <a:latin typeface="Calibri"/>
               </a:rPr>
-              <a:t>•  Why generated code is well predicted</a:t>
+              <a:t>•  2.  Write the description using Week 4's four levers.</a:t>
             </a:r>
           </a:p>
           <a:p>
@@ -8544,7 +9181,7 @@
                 </a:solidFill>
                 <a:latin typeface="Calibri"/>
               </a:rPr>
-              <a:t>—  Code is highly patterned, abundantly available, and common tasks recur in near-identical form.</a:t>
+              <a:t>—  Context: who uses it. Task: what it does. Format: what the output looks like. Example: a sample output if useful.</a:t>
             </a:r>
           </a:p>
           <a:p>
@@ -8563,7 +9200,7 @@
                 </a:solidFill>
                 <a:latin typeface="Calibri"/>
               </a:rPr>
-              <a:t>•  The verification gap</a:t>
+              <a:t>•  3.  Generate it. Then immediately try to break it.</a:t>
             </a:r>
           </a:p>
           <a:p>
@@ -8582,7 +9219,7 @@
                 </a:solidFill>
                 <a:latin typeface="Calibri"/>
               </a:rPr>
-              <a:t>—  You can judge the appearance of a generated tool; you cannot judge its logic. The surface is not evidence.</a:t>
+              <a:t>—  Empty input. Turkish characters. Something absurd. Note what happens.</a:t>
             </a:r>
           </a:p>
           <a:p>
@@ -8601,64 +9238,7 @@
                 </a:solidFill>
                 <a:latin typeface="Calibri"/>
               </a:rPr>
-              <a:t>•  Three quiet failures</a:t>
-            </a:r>
-          </a:p>
-          <a:p>
-            <a:pPr lvl="1">
-              <a:lnSpc>
-                <a:spcPct val="115000"/>
-              </a:lnSpc>
-              <a:spcAft>
-                <a:spcPts val="500"/>
-              </a:spcAft>
-            </a:pPr>
-            <a:r>
-              <a:rPr sz="1600" b="0" i="0">
-                <a:solidFill>
-                  <a:srgbClr val="333D4B"/>
-                </a:solidFill>
-                <a:latin typeface="Calibri"/>
-              </a:rPr>
-              <a:t>—  Wrong logic with right appearance · correct only for the cases tried · silently discarded input.</a:t>
-            </a:r>
-          </a:p>
-          <a:p>
-            <a:pPr>
-              <a:lnSpc>
-                <a:spcPct val="115000"/>
-              </a:lnSpc>
-              <a:spcAft>
-                <a:spcPts val="1000"/>
-              </a:spcAft>
-            </a:pPr>
-            <a:r>
-              <a:rPr sz="1900" b="1" i="0">
-                <a:solidFill>
-                  <a:srgbClr val="1F2937"/>
-                </a:solidFill>
-                <a:latin typeface="Calibri"/>
-              </a:rPr>
-              <a:t>•  Responsible use</a:t>
-            </a:r>
-          </a:p>
-          <a:p>
-            <a:pPr lvl="1">
-              <a:lnSpc>
-                <a:spcPct val="115000"/>
-              </a:lnSpc>
-              <a:spcAft>
-                <a:spcPts val="500"/>
-              </a:spcAft>
-            </a:pPr>
-            <a:r>
-              <a:rPr sz="1600" b="0" i="0">
-                <a:solidFill>
-                  <a:srgbClr val="333D4B"/>
-                </a:solidFill>
-                <a:latin typeface="Calibri"/>
-              </a:rPr>
-              <a:t>—  Test edges first · check a known answer · keep it advisory · no real personal data.</a:t>
+              <a:t>•  4.  Write one sentence: what would you have to check before letting anyone else use this?</a:t>
             </a:r>
           </a:p>
         </p:txBody>
@@ -8779,7 +9359,7 @@
                 </a:solidFill>
                 <a:latin typeface="Calibri Light"/>
               </a:rPr>
-              <a:t>Wrap-Up</a:t>
+              <a:t>What You Probably Found</a:t>
             </a:r>
           </a:p>
         </p:txBody>
@@ -8849,6 +9429,82 @@
             <a:spAutoFit/>
           </a:bodyPr>
           <a:lstStyle/>
+          <a:p>
+            <a:pPr lvl="1">
+              <a:lnSpc>
+                <a:spcPct val="115000"/>
+              </a:lnSpc>
+              <a:spcAft>
+                <a:spcPts val="500"/>
+              </a:spcAft>
+            </a:pPr>
+            <a:r>
+              <a:rPr sz="1600" b="0" i="0">
+                <a:solidFill>
+                  <a:srgbClr val="333D4B"/>
+                </a:solidFill>
+                <a:latin typeface="Calibri"/>
+              </a:rPr>
+              <a:t>—  It worked, and faster than expected. That is the normal outcome — it is not luck.</a:t>
+            </a:r>
+          </a:p>
+          <a:p>
+            <a:pPr lvl="1">
+              <a:lnSpc>
+                <a:spcPct val="115000"/>
+              </a:lnSpc>
+              <a:spcAft>
+                <a:spcPts val="500"/>
+              </a:spcAft>
+            </a:pPr>
+            <a:r>
+              <a:rPr sz="1600" b="0" i="0">
+                <a:solidFill>
+                  <a:srgbClr val="333D4B"/>
+                </a:solidFill>
+                <a:latin typeface="Calibri"/>
+              </a:rPr>
+              <a:t>—  It broke on empty input, or handled it in a way nobody would have chosen deliberately</a:t>
+            </a:r>
+          </a:p>
+          <a:p>
+            <a:pPr lvl="1">
+              <a:lnSpc>
+                <a:spcPct val="115000"/>
+              </a:lnSpc>
+              <a:spcAft>
+                <a:spcPts val="500"/>
+              </a:spcAft>
+            </a:pPr>
+            <a:r>
+              <a:rPr sz="1600" b="0" i="0">
+                <a:solidFill>
+                  <a:srgbClr val="333D4B"/>
+                </a:solidFill>
+                <a:latin typeface="Calibri"/>
+              </a:rPr>
+              <a:t>—  Turkish characters caused a problem somewhere — very common</a:t>
+            </a:r>
+          </a:p>
+          <a:p>
+            <a:pPr lvl="1">
+              <a:lnSpc>
+                <a:spcPct val="115000"/>
+              </a:lnSpc>
+              <a:spcAft>
+                <a:spcPts val="500"/>
+              </a:spcAft>
+            </a:pPr>
+            <a:r>
+              <a:rPr sz="1600" b="0" i="0">
+                <a:solidFill>
+                  <a:srgbClr val="333D4B"/>
+                </a:solidFill>
+                <a:latin typeface="Calibri"/>
+              </a:rPr>
+              <a:t>—  Asking for a change worked, but occasionally broke something that had been working</a:t>
+            </a:r>
+          </a:p>
           <a:p>
             <a:pPr>
               <a:lnSpc>
@@ -8858,15 +9514,6 @@
                 <a:spcPts val="1000"/>
               </a:spcAft>
             </a:pPr>
-            <a:r>
-              <a:rPr sz="1900" b="0" i="0">
-                <a:solidFill>
-                  <a:srgbClr val="1F2937"/>
-                </a:solidFill>
-                <a:latin typeface="Calibri"/>
-              </a:rPr>
-              <a:t>•  You can build working software from a description — and it usually works</a:t>
-            </a:r>
           </a:p>
           <a:p>
             <a:pPr>
@@ -8878,80 +9525,13 @@
               </a:spcAft>
             </a:pPr>
             <a:r>
-              <a:rPr sz="1900" b="0" i="0">
+              <a:rPr sz="1900" b="1" i="0">
                 <a:solidFill>
                   <a:srgbClr val="1F2937"/>
                 </a:solidFill>
                 <a:latin typeface="Calibri"/>
               </a:rPr>
-              <a:t>•  It is next-token prediction where the tokens are code. Week 3 still applies.</a:t>
-            </a:r>
-          </a:p>
-          <a:p>
-            <a:pPr>
-              <a:lnSpc>
-                <a:spcPct val="115000"/>
-              </a:lnSpc>
-              <a:spcAft>
-                <a:spcPts val="1000"/>
-              </a:spcAft>
-            </a:pPr>
-            <a:r>
-              <a:rPr sz="1900" b="1" i="0">
-                <a:solidFill>
-                  <a:srgbClr val="1F2937"/>
-                </a:solidFill>
-                <a:latin typeface="Calibri"/>
-              </a:rPr>
-              <a:t>•  The surface is not evidence. Looking right and being right are different properties.</a:t>
-            </a:r>
-          </a:p>
-          <a:p>
-            <a:pPr>
-              <a:lnSpc>
-                <a:spcPct val="115000"/>
-              </a:lnSpc>
-              <a:spcAft>
-                <a:spcPts val="1000"/>
-              </a:spcAft>
-            </a:pPr>
-            <a:r>
-              <a:rPr sz="1900" b="0" i="0">
-                <a:solidFill>
-                  <a:srgbClr val="1F2937"/>
-                </a:solidFill>
-                <a:latin typeface="Calibri"/>
-              </a:rPr>
-              <a:t>•  Test the edges, check a known case, keep it advisory</a:t>
-            </a:r>
-          </a:p>
-          <a:p>
-            <a:pPr>
-              <a:lnSpc>
-                <a:spcPct val="115000"/>
-              </a:lnSpc>
-              <a:spcAft>
-                <a:spcPts val="1000"/>
-              </a:spcAft>
-            </a:pPr>
-          </a:p>
-          <a:p>
-            <a:pPr>
-              <a:lnSpc>
-                <a:spcPct val="115000"/>
-              </a:lnSpc>
-              <a:spcAft>
-                <a:spcPts val="1000"/>
-              </a:spcAft>
-            </a:pPr>
-            <a:r>
-              <a:rPr sz="1900" b="1" i="0">
-                <a:solidFill>
-                  <a:srgbClr val="1F2937"/>
-                </a:solidFill>
-                <a:latin typeface="Calibri"/>
-              </a:rPr>
-              <a:t>•  Next week:</a:t>
+              <a:t>•  That last one is worth naming: you cannot see what a change affected.</a:t>
             </a:r>
           </a:p>
           <a:p>
@@ -8970,7 +9550,7 @@
                 </a:solidFill>
                 <a:latin typeface="Calibri"/>
               </a:rPr>
-              <a:t>—  Grounding AI in Your Own Sources — how to make it answer from documents you trust, and check that it did</a:t>
+              <a:t>—  When you ask for a modification, re-test the things that already worked. Every time.</a:t>
             </a:r>
           </a:p>
         </p:txBody>
@@ -9064,58 +9644,14 @@
       <p:grpSpPr/>
       <p:sp>
         <p:nvSpPr>
-          <p:cNvPr id="2" name="Rectangle 1"/>
-          <p:cNvSpPr/>
-          <p:nvPr/>
-        </p:nvSpPr>
-        <p:spPr>
-          <a:xfrm>
-            <a:off x="0" y="0"/>
-            <a:ext cx="12191695" cy="6858000"/>
-          </a:xfrm>
-          <a:prstGeom prst="rect">
-            <a:avLst/>
-          </a:prstGeom>
-          <a:solidFill>
-            <a:srgbClr val="1F2937"/>
-          </a:solidFill>
-          <a:ln>
-            <a:noFill/>
-          </a:ln>
-          <a:effectLst/>
-        </p:spPr>
-        <p:style>
-          <a:lnRef idx="1">
-            <a:schemeClr val="accent1"/>
-          </a:lnRef>
-          <a:fillRef idx="3">
-            <a:schemeClr val="accent1"/>
-          </a:fillRef>
-          <a:effectRef idx="2">
-            <a:schemeClr val="accent1"/>
-          </a:effectRef>
-          <a:fontRef idx="minor">
-            <a:schemeClr val="lt1"/>
-          </a:fontRef>
-        </p:style>
-        <p:txBody>
-          <a:bodyPr rtlCol="0" anchor="ctr"/>
-          <a:lstStyle/>
-          <a:p>
-            <a:pPr algn="ctr"/>
-          </a:p>
-        </p:txBody>
-      </p:sp>
-      <p:sp>
-        <p:nvSpPr>
-          <p:cNvPr id="3" name="TextBox 2"/>
+          <p:cNvPr id="2" name="TextBox 1"/>
           <p:cNvSpPr txBox="1"/>
           <p:nvPr/>
         </p:nvSpPr>
         <p:spPr>
           <a:xfrm>
-            <a:off x="777240" y="2468880"/>
-            <a:ext cx="10241280" cy="914400"/>
+            <a:off x="777240" y="566928"/>
+            <a:ext cx="10637215" cy="822960"/>
           </a:xfrm>
           <a:prstGeom prst="rect">
             <a:avLst/>
@@ -9129,27 +9665,27 @@
           <a:lstStyle/>
           <a:p>
             <a:r>
-              <a:rPr sz="4400" b="1" i="0">
-                <a:solidFill>
-                  <a:srgbClr val="FFFFFF"/>
+              <a:rPr sz="3000" b="1" i="0">
+                <a:solidFill>
+                  <a:srgbClr val="1F2937"/>
                 </a:solidFill>
                 <a:latin typeface="Calibri Light"/>
               </a:rPr>
-              <a:t>Questions?</a:t>
-            </a:r>
-          </a:p>
-        </p:txBody>
-      </p:sp>
-      <p:sp>
-        <p:nvSpPr>
-          <p:cNvPr id="4" name="Rectangle 3"/>
+              <a:t>Concepts You Must Be Able to Define and Diagnose</a:t>
+            </a:r>
+          </a:p>
+        </p:txBody>
+      </p:sp>
+      <p:sp>
+        <p:nvSpPr>
+          <p:cNvPr id="3" name="Rectangle 2"/>
           <p:cNvSpPr/>
           <p:nvPr/>
         </p:nvSpPr>
         <p:spPr>
           <a:xfrm>
-            <a:off x="777240" y="3566160"/>
-            <a:ext cx="1051560" cy="50800"/>
+            <a:off x="777240" y="1417320"/>
+            <a:ext cx="1051560" cy="38100"/>
           </a:xfrm>
           <a:prstGeom prst="rect">
             <a:avLst/>
@@ -9186,14 +9722,58 @@
       </p:sp>
       <p:sp>
         <p:nvSpPr>
+          <p:cNvPr id="4" name="Rectangle 3"/>
+          <p:cNvSpPr/>
+          <p:nvPr/>
+        </p:nvSpPr>
+        <p:spPr>
+          <a:xfrm>
+            <a:off x="777240" y="1783080"/>
+            <a:ext cx="10637215" cy="4251960"/>
+          </a:xfrm>
+          <a:prstGeom prst="rect">
+            <a:avLst/>
+          </a:prstGeom>
+          <a:solidFill>
+            <a:srgbClr val="F1F5F9"/>
+          </a:solidFill>
+          <a:ln>
+            <a:noFill/>
+          </a:ln>
+          <a:effectLst/>
+        </p:spPr>
+        <p:style>
+          <a:lnRef idx="1">
+            <a:schemeClr val="accent1"/>
+          </a:lnRef>
+          <a:fillRef idx="3">
+            <a:schemeClr val="accent1"/>
+          </a:fillRef>
+          <a:effectRef idx="2">
+            <a:schemeClr val="accent1"/>
+          </a:effectRef>
+          <a:fontRef idx="minor">
+            <a:schemeClr val="lt1"/>
+          </a:fontRef>
+        </p:style>
+        <p:txBody>
+          <a:bodyPr rtlCol="0" anchor="ctr"/>
+          <a:lstStyle/>
+          <a:p>
+            <a:pPr algn="ctr"/>
+          </a:p>
+        </p:txBody>
+      </p:sp>
+      <p:sp>
+        <p:nvSpPr>
           <p:cNvPr id="5" name="TextBox 4"/>
           <p:cNvSpPr txBox="1"/>
           <p:nvPr/>
         </p:nvSpPr>
         <p:spPr>
           <a:xfrm>
-            <a:off x="777240" y="3931920"/>
-            <a:ext cx="10241280" cy="914400"/>
+            <a:off x="1188720" y="2103120"/>
+            <a:ext cx="9814255" cy="3611880"/>
           </a:xfrm>
           <a:prstGeom prst="rect">
             <a:avLst/>
@@ -9207,34 +9787,261 @@
           <a:lstStyle/>
           <a:p>
             <a:pPr>
+              <a:lnSpc>
+                <a:spcPct val="115000"/>
+              </a:lnSpc>
+              <a:spcAft>
+                <a:spcPts val="1000"/>
+              </a:spcAft>
+            </a:pPr>
+            <a:r>
+              <a:rPr sz="1900" b="1" i="0">
+                <a:solidFill>
+                  <a:srgbClr val="1F2937"/>
+                </a:solidFill>
+                <a:latin typeface="Calibri"/>
+              </a:rPr>
+              <a:t>•  Micro-Tool</a:t>
+            </a:r>
+          </a:p>
+          <a:p>
+            <a:pPr lvl="1">
+              <a:lnSpc>
+                <a:spcPct val="115000"/>
+              </a:lnSpc>
               <a:spcAft>
                 <a:spcPts val="500"/>
               </a:spcAft>
             </a:pPr>
             <a:r>
-              <a:rPr sz="1700" b="0" i="0">
-                <a:solidFill>
-                  <a:srgbClr val="FFFFFF"/>
-                </a:solidFill>
-                <a:latin typeface="Calibri"/>
-              </a:rPr>
-              <a:t>Mehmet Ali Akyol, PhD</a:t>
+              <a:rPr sz="1600" b="0" i="0">
+                <a:solidFill>
+                  <a:srgbClr val="333D4B"/>
+                </a:solidFill>
+                <a:latin typeface="Calibri"/>
+              </a:rPr>
+              <a:t>—  A single-purpose, single-screen tool generated from a description. One job, one screen, no stored data.</a:t>
             </a:r>
           </a:p>
           <a:p>
             <a:pPr>
+              <a:lnSpc>
+                <a:spcPct val="115000"/>
+              </a:lnSpc>
+              <a:spcAft>
+                <a:spcPts val="1000"/>
+              </a:spcAft>
+            </a:pPr>
+            <a:r>
+              <a:rPr sz="1900" b="1" i="0">
+                <a:solidFill>
+                  <a:srgbClr val="1F2937"/>
+                </a:solidFill>
+                <a:latin typeface="Calibri"/>
+              </a:rPr>
+              <a:t>•  Why generated code is well predicted</a:t>
+            </a:r>
+          </a:p>
+          <a:p>
+            <a:pPr lvl="1">
+              <a:lnSpc>
+                <a:spcPct val="115000"/>
+              </a:lnSpc>
               <a:spcAft>
                 <a:spcPts val="500"/>
               </a:spcAft>
             </a:pPr>
             <a:r>
-              <a:rPr sz="1700" b="0" i="0">
-                <a:solidFill>
-                  <a:srgbClr val="C3D0DB"/>
-                </a:solidFill>
-                <a:latin typeface="Calibri"/>
-              </a:rPr>
-              <a:t>mehmetali.akyol@gmail.com</a:t>
+              <a:rPr sz="1600" b="0" i="0">
+                <a:solidFill>
+                  <a:srgbClr val="333D4B"/>
+                </a:solidFill>
+                <a:latin typeface="Calibri"/>
+              </a:rPr>
+              <a:t>—  Code is highly patterned, abundantly available, and common tasks recur in near-identical form.</a:t>
+            </a:r>
+          </a:p>
+          <a:p>
+            <a:pPr>
+              <a:lnSpc>
+                <a:spcPct val="115000"/>
+              </a:lnSpc>
+              <a:spcAft>
+                <a:spcPts val="1000"/>
+              </a:spcAft>
+            </a:pPr>
+            <a:r>
+              <a:rPr sz="1900" b="1" i="0">
+                <a:solidFill>
+                  <a:srgbClr val="1F2937"/>
+                </a:solidFill>
+                <a:latin typeface="Calibri"/>
+              </a:rPr>
+              <a:t>•  The verification gap</a:t>
+            </a:r>
+          </a:p>
+          <a:p>
+            <a:pPr lvl="1">
+              <a:lnSpc>
+                <a:spcPct val="115000"/>
+              </a:lnSpc>
+              <a:spcAft>
+                <a:spcPts val="500"/>
+              </a:spcAft>
+            </a:pPr>
+            <a:r>
+              <a:rPr sz="1600" b="0" i="0">
+                <a:solidFill>
+                  <a:srgbClr val="333D4B"/>
+                </a:solidFill>
+                <a:latin typeface="Calibri"/>
+              </a:rPr>
+              <a:t>—  You can judge the appearance of a generated tool; you cannot judge its logic. The surface is not evidence.</a:t>
+            </a:r>
+          </a:p>
+          <a:p>
+            <a:pPr>
+              <a:lnSpc>
+                <a:spcPct val="115000"/>
+              </a:lnSpc>
+              <a:spcAft>
+                <a:spcPts val="1000"/>
+              </a:spcAft>
+            </a:pPr>
+            <a:r>
+              <a:rPr sz="1900" b="1" i="0">
+                <a:solidFill>
+                  <a:srgbClr val="1F2937"/>
+                </a:solidFill>
+                <a:latin typeface="Calibri"/>
+              </a:rPr>
+              <a:t>•  Three quiet failures</a:t>
+            </a:r>
+          </a:p>
+          <a:p>
+            <a:pPr lvl="1">
+              <a:lnSpc>
+                <a:spcPct val="115000"/>
+              </a:lnSpc>
+              <a:spcAft>
+                <a:spcPts val="500"/>
+              </a:spcAft>
+            </a:pPr>
+            <a:r>
+              <a:rPr sz="1600" b="0" i="0">
+                <a:solidFill>
+                  <a:srgbClr val="333D4B"/>
+                </a:solidFill>
+                <a:latin typeface="Calibri"/>
+              </a:rPr>
+              <a:t>—  Wrong logic with right appearance · correct only for the cases tried · silently discarded input.</a:t>
+            </a:r>
+          </a:p>
+          <a:p>
+            <a:pPr>
+              <a:lnSpc>
+                <a:spcPct val="115000"/>
+              </a:lnSpc>
+              <a:spcAft>
+                <a:spcPts val="1000"/>
+              </a:spcAft>
+            </a:pPr>
+            <a:r>
+              <a:rPr sz="1900" b="1" i="0">
+                <a:solidFill>
+                  <a:srgbClr val="1F2937"/>
+                </a:solidFill>
+                <a:latin typeface="Calibri"/>
+              </a:rPr>
+              <a:t>•  Responsible use</a:t>
+            </a:r>
+          </a:p>
+          <a:p>
+            <a:pPr lvl="1">
+              <a:lnSpc>
+                <a:spcPct val="115000"/>
+              </a:lnSpc>
+              <a:spcAft>
+                <a:spcPts val="500"/>
+              </a:spcAft>
+            </a:pPr>
+            <a:r>
+              <a:rPr sz="1600" b="0" i="0">
+                <a:solidFill>
+                  <a:srgbClr val="333D4B"/>
+                </a:solidFill>
+                <a:latin typeface="Calibri"/>
+              </a:rPr>
+              <a:t>—  Test edges first · check a known answer · keep it advisory · no real personal data.</a:t>
+            </a:r>
+          </a:p>
+        </p:txBody>
+      </p:sp>
+      <p:sp>
+        <p:nvSpPr>
+          <p:cNvPr id="6" name="TextBox 5"/>
+          <p:cNvSpPr txBox="1"/>
+          <p:nvPr/>
+        </p:nvSpPr>
+        <p:spPr>
+          <a:xfrm>
+            <a:off x="777240" y="6355080"/>
+            <a:ext cx="10637215" cy="274320"/>
+          </a:xfrm>
+          <a:prstGeom prst="rect">
+            <a:avLst/>
+          </a:prstGeom>
+          <a:noFill/>
+        </p:spPr>
+        <p:txBody>
+          <a:bodyPr wrap="square" lIns="0" rIns="0" tIns="0" bIns="0">
+            <a:spAutoFit/>
+          </a:bodyPr>
+          <a:lstStyle/>
+          <a:p>
+            <a:r>
+              <a:rPr sz="1000" b="0" i="0">
+                <a:solidFill>
+                  <a:srgbClr val="6B7787"/>
+                </a:solidFill>
+                <a:latin typeface="Calibri"/>
+              </a:rPr>
+              <a:t>Week 6  ·  Prompt Engineering and Large Language Models</a:t>
+            </a:r>
+          </a:p>
+        </p:txBody>
+      </p:sp>
+      <p:sp>
+        <p:nvSpPr>
+          <p:cNvPr id="7" name="TextBox 6"/>
+          <p:cNvSpPr txBox="1"/>
+          <p:nvPr/>
+        </p:nvSpPr>
+        <p:spPr>
+          <a:xfrm>
+            <a:off x="10500055" y="6355080"/>
+            <a:ext cx="914400" cy="274320"/>
+          </a:xfrm>
+          <a:prstGeom prst="rect">
+            <a:avLst/>
+          </a:prstGeom>
+          <a:noFill/>
+        </p:spPr>
+        <p:txBody>
+          <a:bodyPr wrap="square" lIns="0" rIns="0" tIns="0" bIns="0">
+            <a:spAutoFit/>
+          </a:bodyPr>
+          <a:lstStyle/>
+          <a:p>
+            <a:pPr algn="r"/>
+            <a:r>
+              <a:rPr sz="1000" b="0" i="0">
+                <a:solidFill>
+                  <a:srgbClr val="6B7787"/>
+                </a:solidFill>
+                <a:latin typeface="Calibri"/>
+              </a:rPr>
+              <a:t>19</a:t>
             </a:r>
           </a:p>
         </p:txBody>
@@ -9537,6 +10344,513 @@
                 <a:latin typeface="Calibri"/>
               </a:rPr>
               <a:t>2</a:t>
+            </a:r>
+          </a:p>
+        </p:txBody>
+      </p:sp>
+    </p:spTree>
+  </p:cSld>
+  <p:clrMapOvr>
+    <a:masterClrMapping/>
+  </p:clrMapOvr>
+</p:sld>
+</file>
+
+<file path=ppt/slides/slide20.xml><?xml version="1.0" encoding="utf-8"?>
+<p:sld xmlns:a="http://schemas.openxmlformats.org/drawingml/2006/main" xmlns:p="http://schemas.openxmlformats.org/presentationml/2006/main" xmlns:r="http://schemas.openxmlformats.org/officeDocument/2006/relationships">
+  <p:cSld>
+    <p:spTree>
+      <p:nvGrpSpPr>
+        <p:cNvPr id="1" name=""/>
+        <p:cNvGrpSpPr/>
+        <p:nvPr/>
+      </p:nvGrpSpPr>
+      <p:grpSpPr/>
+      <p:sp>
+        <p:nvSpPr>
+          <p:cNvPr id="2" name="TextBox 1"/>
+          <p:cNvSpPr txBox="1"/>
+          <p:nvPr/>
+        </p:nvSpPr>
+        <p:spPr>
+          <a:xfrm>
+            <a:off x="777240" y="566928"/>
+            <a:ext cx="10637215" cy="822960"/>
+          </a:xfrm>
+          <a:prstGeom prst="rect">
+            <a:avLst/>
+          </a:prstGeom>
+          <a:noFill/>
+        </p:spPr>
+        <p:txBody>
+          <a:bodyPr wrap="square" lIns="0" rIns="0" tIns="0" bIns="0">
+            <a:spAutoFit/>
+          </a:bodyPr>
+          <a:lstStyle/>
+          <a:p>
+            <a:r>
+              <a:rPr sz="3000" b="1" i="0">
+                <a:solidFill>
+                  <a:srgbClr val="1F2937"/>
+                </a:solidFill>
+                <a:latin typeface="Calibri Light"/>
+              </a:rPr>
+              <a:t>Wrap-Up</a:t>
+            </a:r>
+          </a:p>
+        </p:txBody>
+      </p:sp>
+      <p:sp>
+        <p:nvSpPr>
+          <p:cNvPr id="3" name="Rectangle 2"/>
+          <p:cNvSpPr/>
+          <p:nvPr/>
+        </p:nvSpPr>
+        <p:spPr>
+          <a:xfrm>
+            <a:off x="777240" y="1417320"/>
+            <a:ext cx="1051560" cy="38100"/>
+          </a:xfrm>
+          <a:prstGeom prst="rect">
+            <a:avLst/>
+          </a:prstGeom>
+          <a:solidFill>
+            <a:srgbClr val="0F766E"/>
+          </a:solidFill>
+          <a:ln>
+            <a:noFill/>
+          </a:ln>
+          <a:effectLst/>
+        </p:spPr>
+        <p:style>
+          <a:lnRef idx="1">
+            <a:schemeClr val="accent1"/>
+          </a:lnRef>
+          <a:fillRef idx="3">
+            <a:schemeClr val="accent1"/>
+          </a:fillRef>
+          <a:effectRef idx="2">
+            <a:schemeClr val="accent1"/>
+          </a:effectRef>
+          <a:fontRef idx="minor">
+            <a:schemeClr val="lt1"/>
+          </a:fontRef>
+        </p:style>
+        <p:txBody>
+          <a:bodyPr rtlCol="0" anchor="ctr"/>
+          <a:lstStyle/>
+          <a:p>
+            <a:pPr algn="ctr"/>
+          </a:p>
+        </p:txBody>
+      </p:sp>
+      <p:sp>
+        <p:nvSpPr>
+          <p:cNvPr id="4" name="TextBox 3"/>
+          <p:cNvSpPr txBox="1"/>
+          <p:nvPr/>
+        </p:nvSpPr>
+        <p:spPr>
+          <a:xfrm>
+            <a:off x="777240" y="1783080"/>
+            <a:ext cx="10637215" cy="4343400"/>
+          </a:xfrm>
+          <a:prstGeom prst="rect">
+            <a:avLst/>
+          </a:prstGeom>
+          <a:noFill/>
+        </p:spPr>
+        <p:txBody>
+          <a:bodyPr wrap="square" lIns="0" rIns="0" tIns="0" bIns="0">
+            <a:spAutoFit/>
+          </a:bodyPr>
+          <a:lstStyle/>
+          <a:p>
+            <a:pPr>
+              <a:lnSpc>
+                <a:spcPct val="115000"/>
+              </a:lnSpc>
+              <a:spcAft>
+                <a:spcPts val="1000"/>
+              </a:spcAft>
+            </a:pPr>
+            <a:r>
+              <a:rPr sz="1900" b="0" i="0">
+                <a:solidFill>
+                  <a:srgbClr val="1F2937"/>
+                </a:solidFill>
+                <a:latin typeface="Calibri"/>
+              </a:rPr>
+              <a:t>•  You can build working software from a description — and it usually works</a:t>
+            </a:r>
+          </a:p>
+          <a:p>
+            <a:pPr>
+              <a:lnSpc>
+                <a:spcPct val="115000"/>
+              </a:lnSpc>
+              <a:spcAft>
+                <a:spcPts val="1000"/>
+              </a:spcAft>
+            </a:pPr>
+            <a:r>
+              <a:rPr sz="1900" b="0" i="0">
+                <a:solidFill>
+                  <a:srgbClr val="1F2937"/>
+                </a:solidFill>
+                <a:latin typeface="Calibri"/>
+              </a:rPr>
+              <a:t>•  It is next-token prediction where the tokens are code. Week 3 still applies.</a:t>
+            </a:r>
+          </a:p>
+          <a:p>
+            <a:pPr>
+              <a:lnSpc>
+                <a:spcPct val="115000"/>
+              </a:lnSpc>
+              <a:spcAft>
+                <a:spcPts val="1000"/>
+              </a:spcAft>
+            </a:pPr>
+            <a:r>
+              <a:rPr sz="1900" b="1" i="0">
+                <a:solidFill>
+                  <a:srgbClr val="1F2937"/>
+                </a:solidFill>
+                <a:latin typeface="Calibri"/>
+              </a:rPr>
+              <a:t>•  The surface is not evidence. Looking right and being right are different properties.</a:t>
+            </a:r>
+          </a:p>
+          <a:p>
+            <a:pPr>
+              <a:lnSpc>
+                <a:spcPct val="115000"/>
+              </a:lnSpc>
+              <a:spcAft>
+                <a:spcPts val="1000"/>
+              </a:spcAft>
+            </a:pPr>
+            <a:r>
+              <a:rPr sz="1900" b="0" i="0">
+                <a:solidFill>
+                  <a:srgbClr val="1F2937"/>
+                </a:solidFill>
+                <a:latin typeface="Calibri"/>
+              </a:rPr>
+              <a:t>•  Test the edges, check a known case, keep it advisory</a:t>
+            </a:r>
+          </a:p>
+          <a:p>
+            <a:pPr>
+              <a:lnSpc>
+                <a:spcPct val="115000"/>
+              </a:lnSpc>
+              <a:spcAft>
+                <a:spcPts val="1000"/>
+              </a:spcAft>
+            </a:pPr>
+          </a:p>
+          <a:p>
+            <a:pPr>
+              <a:lnSpc>
+                <a:spcPct val="115000"/>
+              </a:lnSpc>
+              <a:spcAft>
+                <a:spcPts val="1000"/>
+              </a:spcAft>
+            </a:pPr>
+            <a:r>
+              <a:rPr sz="1900" b="1" i="0">
+                <a:solidFill>
+                  <a:srgbClr val="1F2937"/>
+                </a:solidFill>
+                <a:latin typeface="Calibri"/>
+              </a:rPr>
+              <a:t>•  Next week:</a:t>
+            </a:r>
+          </a:p>
+          <a:p>
+            <a:pPr lvl="1">
+              <a:lnSpc>
+                <a:spcPct val="115000"/>
+              </a:lnSpc>
+              <a:spcAft>
+                <a:spcPts val="500"/>
+              </a:spcAft>
+            </a:pPr>
+            <a:r>
+              <a:rPr sz="1600" b="0" i="0">
+                <a:solidFill>
+                  <a:srgbClr val="333D4B"/>
+                </a:solidFill>
+                <a:latin typeface="Calibri"/>
+              </a:rPr>
+              <a:t>—  Grounding AI in Your Own Sources — how to make it answer from documents you trust, and check that it did</a:t>
+            </a:r>
+          </a:p>
+        </p:txBody>
+      </p:sp>
+      <p:sp>
+        <p:nvSpPr>
+          <p:cNvPr id="5" name="TextBox 4"/>
+          <p:cNvSpPr txBox="1"/>
+          <p:nvPr/>
+        </p:nvSpPr>
+        <p:spPr>
+          <a:xfrm>
+            <a:off x="777240" y="6355080"/>
+            <a:ext cx="10637215" cy="274320"/>
+          </a:xfrm>
+          <a:prstGeom prst="rect">
+            <a:avLst/>
+          </a:prstGeom>
+          <a:noFill/>
+        </p:spPr>
+        <p:txBody>
+          <a:bodyPr wrap="square" lIns="0" rIns="0" tIns="0" bIns="0">
+            <a:spAutoFit/>
+          </a:bodyPr>
+          <a:lstStyle/>
+          <a:p>
+            <a:r>
+              <a:rPr sz="1000" b="0" i="0">
+                <a:solidFill>
+                  <a:srgbClr val="6B7787"/>
+                </a:solidFill>
+                <a:latin typeface="Calibri"/>
+              </a:rPr>
+              <a:t>Week 6  ·  Prompt Engineering and Large Language Models</a:t>
+            </a:r>
+          </a:p>
+        </p:txBody>
+      </p:sp>
+      <p:sp>
+        <p:nvSpPr>
+          <p:cNvPr id="6" name="TextBox 5"/>
+          <p:cNvSpPr txBox="1"/>
+          <p:nvPr/>
+        </p:nvSpPr>
+        <p:spPr>
+          <a:xfrm>
+            <a:off x="10500055" y="6355080"/>
+            <a:ext cx="914400" cy="274320"/>
+          </a:xfrm>
+          <a:prstGeom prst="rect">
+            <a:avLst/>
+          </a:prstGeom>
+          <a:noFill/>
+        </p:spPr>
+        <p:txBody>
+          <a:bodyPr wrap="square" lIns="0" rIns="0" tIns="0" bIns="0">
+            <a:spAutoFit/>
+          </a:bodyPr>
+          <a:lstStyle/>
+          <a:p>
+            <a:pPr algn="r"/>
+            <a:r>
+              <a:rPr sz="1000" b="0" i="0">
+                <a:solidFill>
+                  <a:srgbClr val="6B7787"/>
+                </a:solidFill>
+                <a:latin typeface="Calibri"/>
+              </a:rPr>
+              <a:t>20</a:t>
+            </a:r>
+          </a:p>
+        </p:txBody>
+      </p:sp>
+    </p:spTree>
+  </p:cSld>
+  <p:clrMapOvr>
+    <a:masterClrMapping/>
+  </p:clrMapOvr>
+</p:sld>
+</file>
+
+<file path=ppt/slides/slide21.xml><?xml version="1.0" encoding="utf-8"?>
+<p:sld xmlns:a="http://schemas.openxmlformats.org/drawingml/2006/main" xmlns:p="http://schemas.openxmlformats.org/presentationml/2006/main" xmlns:r="http://schemas.openxmlformats.org/officeDocument/2006/relationships">
+  <p:cSld>
+    <p:spTree>
+      <p:nvGrpSpPr>
+        <p:cNvPr id="1" name=""/>
+        <p:cNvGrpSpPr/>
+        <p:nvPr/>
+      </p:nvGrpSpPr>
+      <p:grpSpPr/>
+      <p:sp>
+        <p:nvSpPr>
+          <p:cNvPr id="2" name="Rectangle 1"/>
+          <p:cNvSpPr/>
+          <p:nvPr/>
+        </p:nvSpPr>
+        <p:spPr>
+          <a:xfrm>
+            <a:off x="0" y="0"/>
+            <a:ext cx="12191695" cy="6858000"/>
+          </a:xfrm>
+          <a:prstGeom prst="rect">
+            <a:avLst/>
+          </a:prstGeom>
+          <a:solidFill>
+            <a:srgbClr val="1F2937"/>
+          </a:solidFill>
+          <a:ln>
+            <a:noFill/>
+          </a:ln>
+          <a:effectLst/>
+        </p:spPr>
+        <p:style>
+          <a:lnRef idx="1">
+            <a:schemeClr val="accent1"/>
+          </a:lnRef>
+          <a:fillRef idx="3">
+            <a:schemeClr val="accent1"/>
+          </a:fillRef>
+          <a:effectRef idx="2">
+            <a:schemeClr val="accent1"/>
+          </a:effectRef>
+          <a:fontRef idx="minor">
+            <a:schemeClr val="lt1"/>
+          </a:fontRef>
+        </p:style>
+        <p:txBody>
+          <a:bodyPr rtlCol="0" anchor="ctr"/>
+          <a:lstStyle/>
+          <a:p>
+            <a:pPr algn="ctr"/>
+          </a:p>
+        </p:txBody>
+      </p:sp>
+      <p:sp>
+        <p:nvSpPr>
+          <p:cNvPr id="3" name="TextBox 2"/>
+          <p:cNvSpPr txBox="1"/>
+          <p:nvPr/>
+        </p:nvSpPr>
+        <p:spPr>
+          <a:xfrm>
+            <a:off x="777240" y="2468880"/>
+            <a:ext cx="10241280" cy="914400"/>
+          </a:xfrm>
+          <a:prstGeom prst="rect">
+            <a:avLst/>
+          </a:prstGeom>
+          <a:noFill/>
+        </p:spPr>
+        <p:txBody>
+          <a:bodyPr wrap="square" lIns="0" rIns="0" tIns="0" bIns="0">
+            <a:spAutoFit/>
+          </a:bodyPr>
+          <a:lstStyle/>
+          <a:p>
+            <a:r>
+              <a:rPr sz="4400" b="1" i="0">
+                <a:solidFill>
+                  <a:srgbClr val="FFFFFF"/>
+                </a:solidFill>
+                <a:latin typeface="Calibri Light"/>
+              </a:rPr>
+              <a:t>Questions?</a:t>
+            </a:r>
+          </a:p>
+        </p:txBody>
+      </p:sp>
+      <p:sp>
+        <p:nvSpPr>
+          <p:cNvPr id="4" name="Rectangle 3"/>
+          <p:cNvSpPr/>
+          <p:nvPr/>
+        </p:nvSpPr>
+        <p:spPr>
+          <a:xfrm>
+            <a:off x="777240" y="3566160"/>
+            <a:ext cx="1051560" cy="50800"/>
+          </a:xfrm>
+          <a:prstGeom prst="rect">
+            <a:avLst/>
+          </a:prstGeom>
+          <a:solidFill>
+            <a:srgbClr val="0F766E"/>
+          </a:solidFill>
+          <a:ln>
+            <a:noFill/>
+          </a:ln>
+          <a:effectLst/>
+        </p:spPr>
+        <p:style>
+          <a:lnRef idx="1">
+            <a:schemeClr val="accent1"/>
+          </a:lnRef>
+          <a:fillRef idx="3">
+            <a:schemeClr val="accent1"/>
+          </a:fillRef>
+          <a:effectRef idx="2">
+            <a:schemeClr val="accent1"/>
+          </a:effectRef>
+          <a:fontRef idx="minor">
+            <a:schemeClr val="lt1"/>
+          </a:fontRef>
+        </p:style>
+        <p:txBody>
+          <a:bodyPr rtlCol="0" anchor="ctr"/>
+          <a:lstStyle/>
+          <a:p>
+            <a:pPr algn="ctr"/>
+          </a:p>
+        </p:txBody>
+      </p:sp>
+      <p:sp>
+        <p:nvSpPr>
+          <p:cNvPr id="5" name="TextBox 4"/>
+          <p:cNvSpPr txBox="1"/>
+          <p:nvPr/>
+        </p:nvSpPr>
+        <p:spPr>
+          <a:xfrm>
+            <a:off x="777240" y="3931920"/>
+            <a:ext cx="10241280" cy="914400"/>
+          </a:xfrm>
+          <a:prstGeom prst="rect">
+            <a:avLst/>
+          </a:prstGeom>
+          <a:noFill/>
+        </p:spPr>
+        <p:txBody>
+          <a:bodyPr wrap="square" lIns="0" rIns="0" tIns="0" bIns="0">
+            <a:spAutoFit/>
+          </a:bodyPr>
+          <a:lstStyle/>
+          <a:p>
+            <a:pPr>
+              <a:spcAft>
+                <a:spcPts val="500"/>
+              </a:spcAft>
+            </a:pPr>
+            <a:r>
+              <a:rPr sz="1700" b="0" i="0">
+                <a:solidFill>
+                  <a:srgbClr val="FFFFFF"/>
+                </a:solidFill>
+                <a:latin typeface="Calibri"/>
+              </a:rPr>
+              <a:t>Mehmet Ali Akyol, PhD</a:t>
+            </a:r>
+          </a:p>
+          <a:p>
+            <a:pPr>
+              <a:spcAft>
+                <a:spcPts val="500"/>
+              </a:spcAft>
+            </a:pPr>
+            <a:r>
+              <a:rPr sz="1700" b="0" i="0">
+                <a:solidFill>
+                  <a:srgbClr val="C3D0DB"/>
+                </a:solidFill>
+                <a:latin typeface="Calibri"/>
+              </a:rPr>
+              <a:t>mehmetali.akyol@gmail.com</a:t>
             </a:r>
           </a:p>
         </p:txBody>
